--- a/sjoskolan/vecka-45/aktuell/v45_02_Analys_av_matresultat_elev.pptx
+++ b/sjoskolan/vecka-45/aktuell/v45_02_Analys_av_matresultat_elev.pptx
@@ -4566,7 +4566,40 @@
                 <a:ea typeface="Calibri"/>
                 <a:cs typeface="Calibri"/>
               </a:rPr>
-              <a:t>Krav: Unom · (1 ± p/100)</a:t>
+              <a:t>Krav: </a:t>
+            </a:r>
+            <a:r>
+              <a:rPr sz="2400" b="1">
+                <a:solidFill>
+                  <a:srgbClr val="064F91"/>
+                </a:solidFill>
+                <a:latin typeface="Calibri"/>
+                <a:ea typeface="Calibri"/>
+                <a:cs typeface="Calibri"/>
+              </a:rPr>
+              <a:t>U</a:t>
+            </a:r>
+            <a:r>
+              <a:rPr sz="2400" b="1" baseline="-25000">
+                <a:solidFill>
+                  <a:srgbClr val="064F91"/>
+                </a:solidFill>
+                <a:latin typeface="Calibri"/>
+                <a:ea typeface="Calibri"/>
+                <a:cs typeface="Calibri"/>
+              </a:rPr>
+              <a:t>nom</a:t>
+            </a:r>
+            <a:r>
+              <a:rPr sz="2400" b="1">
+                <a:solidFill>
+                  <a:srgbClr val="064F91"/>
+                </a:solidFill>
+                <a:latin typeface="Calibri"/>
+                <a:ea typeface="Calibri"/>
+                <a:cs typeface="Calibri"/>
+              </a:rPr>
+              <a:t> · (1 ± p/100)</a:t>
             </a:r>
           </a:p>
           <a:p xmlns:a="http://schemas.openxmlformats.org/drawingml/2006/main">
@@ -4589,7 +4622,40 @@
                 <a:ea typeface="Calibri"/>
                 <a:cs typeface="Calibri"/>
               </a:rPr>
-              <a:t>Mätintervall: Um ± δ</a:t>
+              <a:t>Mätintervall: </a:t>
+            </a:r>
+            <a:r>
+              <a:rPr sz="2400" b="1">
+                <a:solidFill>
+                  <a:srgbClr val="064F91"/>
+                </a:solidFill>
+                <a:latin typeface="Calibri"/>
+                <a:ea typeface="Calibri"/>
+                <a:cs typeface="Calibri"/>
+              </a:rPr>
+              <a:t>U</a:t>
+            </a:r>
+            <a:r>
+              <a:rPr sz="2400" b="1" baseline="-25000">
+                <a:solidFill>
+                  <a:srgbClr val="064F91"/>
+                </a:solidFill>
+                <a:latin typeface="Calibri"/>
+                <a:ea typeface="Calibri"/>
+                <a:cs typeface="Calibri"/>
+              </a:rPr>
+              <a:t>m</a:t>
+            </a:r>
+            <a:r>
+              <a:rPr sz="2400" b="1">
+                <a:solidFill>
+                  <a:srgbClr val="064F91"/>
+                </a:solidFill>
+                <a:latin typeface="Calibri"/>
+                <a:ea typeface="Calibri"/>
+                <a:cs typeface="Calibri"/>
+              </a:rPr>
+              <a:t> ± δ</a:t>
             </a:r>
           </a:p>
         </p:txBody>
@@ -4703,7 +4769,73 @@
                 <a:ea typeface="Calibri"/>
                 <a:cs typeface="Calibri"/>
               </a:rPr>
-              <a:t>Förutsättningar: Unom = 12,0 V, p = 5, Um = 11,45 V, δ = 0,10 V. Gränsvärden räknas som tillåtna.</a:t>
+              <a:t>Förutsättningar: </a:t>
+            </a:r>
+            <a:r>
+              <a:rPr sz="2025" b="0">
+                <a:solidFill>
+                  <a:srgbClr val="111111"/>
+                </a:solidFill>
+                <a:latin typeface="Calibri"/>
+                <a:ea typeface="Calibri"/>
+                <a:cs typeface="Calibri"/>
+              </a:rPr>
+              <a:t>U</a:t>
+            </a:r>
+            <a:r>
+              <a:rPr sz="2025" b="0" baseline="-25000">
+                <a:solidFill>
+                  <a:srgbClr val="111111"/>
+                </a:solidFill>
+                <a:latin typeface="Calibri"/>
+                <a:ea typeface="Calibri"/>
+                <a:cs typeface="Calibri"/>
+              </a:rPr>
+              <a:t>nom</a:t>
+            </a:r>
+            <a:r>
+              <a:rPr sz="2025" b="0">
+                <a:solidFill>
+                  <a:srgbClr val="111111"/>
+                </a:solidFill>
+                <a:latin typeface="Calibri"/>
+                <a:ea typeface="Calibri"/>
+                <a:cs typeface="Calibri"/>
+              </a:rPr>
+              <a:t> = 12,0 V, p = 5, </a:t>
+            </a:r>
+            <a:r>
+              <a:rPr sz="2025" b="0">
+                <a:solidFill>
+                  <a:srgbClr val="111111"/>
+                </a:solidFill>
+                <a:latin typeface="Calibri"/>
+                <a:ea typeface="Calibri"/>
+                <a:cs typeface="Calibri"/>
+              </a:rPr>
+              <a:t>U</a:t>
+            </a:r>
+            <a:r>
+              <a:rPr sz="2025" b="0" baseline="-25000">
+                <a:solidFill>
+                  <a:srgbClr val="111111"/>
+                </a:solidFill>
+                <a:latin typeface="Calibri"/>
+                <a:ea typeface="Calibri"/>
+                <a:cs typeface="Calibri"/>
+              </a:rPr>
+              <a:t>m</a:t>
+            </a:r>
+            <a:r>
+              <a:rPr sz="2025" b="0">
+                <a:solidFill>
+                  <a:srgbClr val="111111"/>
+                </a:solidFill>
+                <a:latin typeface="Calibri"/>
+                <a:ea typeface="Calibri"/>
+                <a:cs typeface="Calibri"/>
+              </a:rPr>
+              <a:t> = 11,45 V, δ = 0,10 V. Gränsvärden räknas som tillåtna.</a:t>
             </a:r>
           </a:p>
         </p:txBody>
@@ -6037,7 +6169,84 @@
                 <a:ea typeface="Calibri"/>
                 <a:cs typeface="Calibri"/>
               </a:rPr>
-              <a:t>ΔUtotal = Ukälla − Ulast</a:t>
+              <a:t>ΔU</a:t>
+            </a:r>
+            <a:r>
+              <a:rPr sz="2400" b="1" baseline="-25000">
+                <a:solidFill>
+                  <a:srgbClr val="064F91"/>
+                </a:solidFill>
+                <a:latin typeface="Calibri"/>
+                <a:ea typeface="Calibri"/>
+                <a:cs typeface="Calibri"/>
+              </a:rPr>
+              <a:t>total</a:t>
+            </a:r>
+            <a:r>
+              <a:rPr sz="2400" b="1">
+                <a:solidFill>
+                  <a:srgbClr val="064F91"/>
+                </a:solidFill>
+                <a:latin typeface="Calibri"/>
+                <a:ea typeface="Calibri"/>
+                <a:cs typeface="Calibri"/>
+              </a:rPr>
+              <a:t> = </a:t>
+            </a:r>
+            <a:r>
+              <a:rPr sz="2400" b="1">
+                <a:solidFill>
+                  <a:srgbClr val="064F91"/>
+                </a:solidFill>
+                <a:latin typeface="Calibri"/>
+                <a:ea typeface="Calibri"/>
+                <a:cs typeface="Calibri"/>
+              </a:rPr>
+              <a:t>U</a:t>
+            </a:r>
+            <a:r>
+              <a:rPr sz="2400" b="1" baseline="-25000">
+                <a:solidFill>
+                  <a:srgbClr val="064F91"/>
+                </a:solidFill>
+                <a:latin typeface="Calibri"/>
+                <a:ea typeface="Calibri"/>
+                <a:cs typeface="Calibri"/>
+              </a:rPr>
+              <a:t>källa</a:t>
+            </a:r>
+            <a:r>
+              <a:rPr sz="2400" b="1">
+                <a:solidFill>
+                  <a:srgbClr val="064F91"/>
+                </a:solidFill>
+                <a:latin typeface="Calibri"/>
+                <a:ea typeface="Calibri"/>
+                <a:cs typeface="Calibri"/>
+              </a:rPr>
+              <a:t> − </a:t>
+            </a:r>
+            <a:r>
+              <a:rPr sz="2400" b="1">
+                <a:solidFill>
+                  <a:srgbClr val="064F91"/>
+                </a:solidFill>
+                <a:latin typeface="Calibri"/>
+                <a:ea typeface="Calibri"/>
+                <a:cs typeface="Calibri"/>
+              </a:rPr>
+              <a:t>U</a:t>
+            </a:r>
+            <a:r>
+              <a:rPr sz="2400" b="1" baseline="-25000">
+                <a:solidFill>
+                  <a:srgbClr val="064F91"/>
+                </a:solidFill>
+                <a:latin typeface="Calibri"/>
+                <a:ea typeface="Calibri"/>
+                <a:cs typeface="Calibri"/>
+              </a:rPr>
+              <a:t>last</a:t>
             </a:r>
           </a:p>
           <a:p xmlns:a="http://schemas.openxmlformats.org/drawingml/2006/main">
@@ -6060,7 +6269,84 @@
                 <a:ea typeface="Calibri"/>
                 <a:cs typeface="Calibri"/>
               </a:rPr>
-              <a:t>ΔUfram = ΔUtotal − ΔUretur</a:t>
+              <a:t>ΔU</a:t>
+            </a:r>
+            <a:r>
+              <a:rPr sz="2400" b="1" baseline="-25000">
+                <a:solidFill>
+                  <a:srgbClr val="064F91"/>
+                </a:solidFill>
+                <a:latin typeface="Calibri"/>
+                <a:ea typeface="Calibri"/>
+                <a:cs typeface="Calibri"/>
+              </a:rPr>
+              <a:t>fram</a:t>
+            </a:r>
+            <a:r>
+              <a:rPr sz="2400" b="1">
+                <a:solidFill>
+                  <a:srgbClr val="064F91"/>
+                </a:solidFill>
+                <a:latin typeface="Calibri"/>
+                <a:ea typeface="Calibri"/>
+                <a:cs typeface="Calibri"/>
+              </a:rPr>
+              <a:t> = </a:t>
+            </a:r>
+            <a:r>
+              <a:rPr sz="2400" b="1">
+                <a:solidFill>
+                  <a:srgbClr val="064F91"/>
+                </a:solidFill>
+                <a:latin typeface="Calibri"/>
+                <a:ea typeface="Calibri"/>
+                <a:cs typeface="Calibri"/>
+              </a:rPr>
+              <a:t>ΔU</a:t>
+            </a:r>
+            <a:r>
+              <a:rPr sz="2400" b="1" baseline="-25000">
+                <a:solidFill>
+                  <a:srgbClr val="064F91"/>
+                </a:solidFill>
+                <a:latin typeface="Calibri"/>
+                <a:ea typeface="Calibri"/>
+                <a:cs typeface="Calibri"/>
+              </a:rPr>
+              <a:t>total</a:t>
+            </a:r>
+            <a:r>
+              <a:rPr sz="2400" b="1">
+                <a:solidFill>
+                  <a:srgbClr val="064F91"/>
+                </a:solidFill>
+                <a:latin typeface="Calibri"/>
+                <a:ea typeface="Calibri"/>
+                <a:cs typeface="Calibri"/>
+              </a:rPr>
+              <a:t> − </a:t>
+            </a:r>
+            <a:r>
+              <a:rPr sz="2400" b="1">
+                <a:solidFill>
+                  <a:srgbClr val="064F91"/>
+                </a:solidFill>
+                <a:latin typeface="Calibri"/>
+                <a:ea typeface="Calibri"/>
+                <a:cs typeface="Calibri"/>
+              </a:rPr>
+              <a:t>ΔU</a:t>
+            </a:r>
+            <a:r>
+              <a:rPr sz="2400" b="1" baseline="-25000">
+                <a:solidFill>
+                  <a:srgbClr val="064F91"/>
+                </a:solidFill>
+                <a:latin typeface="Calibri"/>
+                <a:ea typeface="Calibri"/>
+                <a:cs typeface="Calibri"/>
+              </a:rPr>
+              <a:t>retur</a:t>
             </a:r>
           </a:p>
         </p:txBody>
@@ -6472,7 +6758,7 @@
         <p:spPr>
           <a:xfrm xmlns:a="http://schemas.openxmlformats.org/drawingml/2006/main">
             <a:off x="762000" y="2533650"/>
-            <a:ext cx="7620000" cy="2286000"/>
+            <a:ext cx="3886200" cy="2606040"/>
           </a:xfrm>
           <a:prstGeom xmlns:a="http://schemas.openxmlformats.org/drawingml/2006/main" prst="rect">
             <a:avLst/>
@@ -6508,7 +6794,7 @@
                 <a:ea typeface="Calibri"/>
                 <a:cs typeface="Calibri"/>
               </a:rPr>
-              <a:t>Källa 24 V, last 20 V och ström 2 A. Returfallet är uppmätt till 1 V. Hur stort fall finns i framledningen?</a:t>
+              <a:t>Källa 24 V, last 20 V och ström 2 A. Returfallet är uppmätt till 1 V. Hur stort fall finns i framledningen?</a:t>
             </a:r>
           </a:p>
         </p:txBody>
@@ -6629,6 +6915,30 @@
           </a:p>
         </p:txBody>
       </p:sp>
+      <p:pic xmlns:a="http://schemas.openxmlformats.org/drawingml/2006/main" xmlns:r="http://schemas.openxmlformats.org/officeDocument/2006/relationships">
+        <p:nvPicPr>
+          <p:cNvPr id="9" name="Figur: Seriekrets: källa 24 V, last 20 V, ström" descr="Seriekrets: källa 24 V, last 20 V, ström 2 A och 1 V fall i returen; fallet i framledningen okänt"/>
+          <p:cNvPicPr>
+            <a:picLocks noChangeAspect="1"/>
+          </p:cNvPicPr>
+          <p:nvPr/>
+        </p:nvPicPr>
+        <p:blipFill>
+          <a:blip r:embed="rId3"/>
+          <a:stretch>
+            <a:fillRect/>
+          </a:stretch>
+        </p:blipFill>
+        <p:spPr>
+          <a:xfrm>
+            <a:off x="4846320" y="2331720"/>
+            <a:ext cx="3931920" cy="2740984"/>
+          </a:xfrm>
+          <a:prstGeom prst="rect">
+            <a:avLst/>
+          </a:prstGeom>
+        </p:spPr>
+      </p:pic>
     </p:spTree>
     <p:extLst>
       <p:ext uri="{BB962C8B-B14F-4D97-AF65-F5344CB8AC3E}">
@@ -6784,7 +7094,128 @@
                 <a:ea typeface="Calibri"/>
                 <a:cs typeface="Calibri"/>
               </a:rPr>
-              <a:t>Rfram = ΔUfram/I     Rretur = ΔUretur/I</a:t>
+              <a:t>R</a:t>
+            </a:r>
+            <a:r>
+              <a:rPr sz="2400" b="1" baseline="-25000">
+                <a:solidFill>
+                  <a:srgbClr val="064F91"/>
+                </a:solidFill>
+                <a:latin typeface="Calibri"/>
+                <a:ea typeface="Calibri"/>
+                <a:cs typeface="Calibri"/>
+              </a:rPr>
+              <a:t>fram</a:t>
+            </a:r>
+            <a:r>
+              <a:rPr sz="2400" b="1">
+                <a:solidFill>
+                  <a:srgbClr val="064F91"/>
+                </a:solidFill>
+                <a:latin typeface="Calibri"/>
+                <a:ea typeface="Calibri"/>
+                <a:cs typeface="Calibri"/>
+              </a:rPr>
+              <a:t> = </a:t>
+            </a:r>
+            <a:r>
+              <a:rPr sz="2400" b="1">
+                <a:solidFill>
+                  <a:srgbClr val="064F91"/>
+                </a:solidFill>
+                <a:latin typeface="Calibri"/>
+                <a:ea typeface="Calibri"/>
+                <a:cs typeface="Calibri"/>
+              </a:rPr>
+              <a:t>ΔU</a:t>
+            </a:r>
+            <a:r>
+              <a:rPr sz="2400" b="1" baseline="-25000">
+                <a:solidFill>
+                  <a:srgbClr val="064F91"/>
+                </a:solidFill>
+                <a:latin typeface="Calibri"/>
+                <a:ea typeface="Calibri"/>
+                <a:cs typeface="Calibri"/>
+              </a:rPr>
+              <a:t>fram</a:t>
+            </a:r>
+            <a:r>
+              <a:rPr sz="2400" b="1">
+                <a:solidFill>
+                  <a:srgbClr val="064F91"/>
+                </a:solidFill>
+                <a:latin typeface="Calibri"/>
+                <a:ea typeface="Calibri"/>
+                <a:cs typeface="Calibri"/>
+              </a:rPr>
+              <a:t>/I     </a:t>
+            </a:r>
+            <a:r>
+              <a:rPr sz="2400" b="1">
+                <a:solidFill>
+                  <a:srgbClr val="064F91"/>
+                </a:solidFill>
+                <a:latin typeface="Calibri"/>
+                <a:ea typeface="Calibri"/>
+                <a:cs typeface="Calibri"/>
+              </a:rPr>
+              <a:t>R</a:t>
+            </a:r>
+            <a:r>
+              <a:rPr sz="2400" b="1" baseline="-25000">
+                <a:solidFill>
+                  <a:srgbClr val="064F91"/>
+                </a:solidFill>
+                <a:latin typeface="Calibri"/>
+                <a:ea typeface="Calibri"/>
+                <a:cs typeface="Calibri"/>
+              </a:rPr>
+              <a:t>retur</a:t>
+            </a:r>
+            <a:r>
+              <a:rPr sz="2400" b="1">
+                <a:solidFill>
+                  <a:srgbClr val="064F91"/>
+                </a:solidFill>
+                <a:latin typeface="Calibri"/>
+                <a:ea typeface="Calibri"/>
+                <a:cs typeface="Calibri"/>
+              </a:rPr>
+              <a:t> = </a:t>
+            </a:r>
+            <a:r>
+              <a:rPr sz="2400" b="1">
+                <a:solidFill>
+                  <a:srgbClr val="064F91"/>
+                </a:solidFill>
+                <a:latin typeface="Calibri"/>
+                <a:ea typeface="Calibri"/>
+                <a:cs typeface="Calibri"/>
+              </a:rPr>
+              <a:t>ΔU</a:t>
+            </a:r>
+            <a:r>
+              <a:rPr sz="2400" b="1" baseline="-25000">
+                <a:solidFill>
+                  <a:srgbClr val="064F91"/>
+                </a:solidFill>
+                <a:latin typeface="Calibri"/>
+                <a:ea typeface="Calibri"/>
+                <a:cs typeface="Calibri"/>
+              </a:rPr>
+              <a:t>retur</a:t>
+            </a:r>
+            <a:r>
+              <a:rPr sz="2400" b="1">
+                <a:solidFill>
+                  <a:srgbClr val="064F91"/>
+                </a:solidFill>
+                <a:latin typeface="Calibri"/>
+                <a:ea typeface="Calibri"/>
+                <a:cs typeface="Calibri"/>
+              </a:rPr>
+              <a:t>/I</a:t>
             </a:r>
           </a:p>
         </p:txBody>
@@ -6898,7 +7329,73 @@
                 <a:ea typeface="Calibri"/>
                 <a:cs typeface="Calibri"/>
               </a:rPr>
-              <a:t>Förutsättningar: Källa 24 V, last 20 V, I = 2 A. ΔUretur = 1 V och ΔUfram = 24 − 20 − 1 V.</a:t>
+              <a:t>Förutsättningar: Källa 24 V, last 20 V, I = 2 A. </a:t>
+            </a:r>
+            <a:r>
+              <a:rPr sz="2025" b="0">
+                <a:solidFill>
+                  <a:srgbClr val="111111"/>
+                </a:solidFill>
+                <a:latin typeface="Calibri"/>
+                <a:ea typeface="Calibri"/>
+                <a:cs typeface="Calibri"/>
+              </a:rPr>
+              <a:t>ΔU</a:t>
+            </a:r>
+            <a:r>
+              <a:rPr sz="2025" b="0" baseline="-25000">
+                <a:solidFill>
+                  <a:srgbClr val="111111"/>
+                </a:solidFill>
+                <a:latin typeface="Calibri"/>
+                <a:ea typeface="Calibri"/>
+                <a:cs typeface="Calibri"/>
+              </a:rPr>
+              <a:t>retur</a:t>
+            </a:r>
+            <a:r>
+              <a:rPr sz="2025" b="0">
+                <a:solidFill>
+                  <a:srgbClr val="111111"/>
+                </a:solidFill>
+                <a:latin typeface="Calibri"/>
+                <a:ea typeface="Calibri"/>
+                <a:cs typeface="Calibri"/>
+              </a:rPr>
+              <a:t> = 1 V och </a:t>
+            </a:r>
+            <a:r>
+              <a:rPr sz="2025" b="0">
+                <a:solidFill>
+                  <a:srgbClr val="111111"/>
+                </a:solidFill>
+                <a:latin typeface="Calibri"/>
+                <a:ea typeface="Calibri"/>
+                <a:cs typeface="Calibri"/>
+              </a:rPr>
+              <a:t>ΔU</a:t>
+            </a:r>
+            <a:r>
+              <a:rPr sz="2025" b="0" baseline="-25000">
+                <a:solidFill>
+                  <a:srgbClr val="111111"/>
+                </a:solidFill>
+                <a:latin typeface="Calibri"/>
+                <a:ea typeface="Calibri"/>
+                <a:cs typeface="Calibri"/>
+              </a:rPr>
+              <a:t>fram</a:t>
+            </a:r>
+            <a:r>
+              <a:rPr sz="2025" b="0">
+                <a:solidFill>
+                  <a:srgbClr val="111111"/>
+                </a:solidFill>
+                <a:latin typeface="Calibri"/>
+                <a:ea typeface="Calibri"/>
+                <a:cs typeface="Calibri"/>
+              </a:rPr>
+              <a:t> = 24 − 20 − 1 V.</a:t>
             </a:r>
           </a:p>
         </p:txBody>
@@ -9369,7 +9866,7 @@
         <p:spPr>
           <a:xfrm xmlns:a="http://schemas.openxmlformats.org/drawingml/2006/main">
             <a:off x="762000" y="1571625"/>
-            <a:ext cx="7620000" cy="990600"/>
+            <a:ext cx="3977639" cy="990600"/>
           </a:xfrm>
           <a:prstGeom xmlns:a="http://schemas.openxmlformats.org/drawingml/2006/main" prst="rect">
             <a:avLst/>
@@ -9396,15 +9893,15 @@
               </a:defRPr>
             </a:pPr>
             <a:r>
-              <a:rPr sz="2175" b="0">
-                <a:solidFill>
-                  <a:srgbClr val="111111"/>
-                </a:solidFill>
-                <a:latin typeface="Calibri"/>
-                <a:ea typeface="Calibri"/>
-                <a:cs typeface="Calibri"/>
-              </a:rPr>
-              <a:t>Källa 12 V, last 9 V och ström 1,5 A. Returens fall är 0,75 V. Samtidiga data.</a:t>
+              <a:rPr sz="2100" b="0">
+                <a:solidFill>
+                  <a:srgbClr val="111111"/>
+                </a:solidFill>
+                <a:latin typeface="Calibri"/>
+                <a:ea typeface="Calibri"/>
+                <a:cs typeface="Calibri"/>
+              </a:rPr>
+              <a:t>Källa 12 V, last 9 V och ström 1,5 A. Returens fall är 0,75 V. Samtidiga data.</a:t>
             </a:r>
           </a:p>
         </p:txBody>
@@ -9426,7 +9923,7 @@
         <p:spPr>
           <a:xfrm xmlns:a="http://schemas.openxmlformats.org/drawingml/2006/main">
             <a:off x="762000" y="2705100"/>
-            <a:ext cx="7620000" cy="790575"/>
+            <a:ext cx="3977639" cy="790575"/>
           </a:xfrm>
           <a:prstGeom xmlns:a="http://schemas.openxmlformats.org/drawingml/2006/main" prst="rect">
             <a:avLst/>
@@ -9453,7 +9950,7 @@
               </a:defRPr>
             </a:pPr>
             <a:r>
-              <a:rPr sz="2325" b="1">
+              <a:rPr sz="1700" b="1">
                 <a:solidFill>
                   <a:srgbClr val="064F91"/>
                 </a:solidFill>
@@ -9461,7 +9958,117 @@
                 <a:ea typeface="Calibri"/>
                 <a:cs typeface="Calibri"/>
               </a:rPr>
-              <a:t>ΔUfram = Ukälla − Ulast − ΔUretur</a:t>
+              <a:t>ΔU</a:t>
+            </a:r>
+            <a:r>
+              <a:rPr sz="1700" b="1" baseline="-25000">
+                <a:solidFill>
+                  <a:srgbClr val="064F91"/>
+                </a:solidFill>
+                <a:latin typeface="Calibri"/>
+                <a:ea typeface="Calibri"/>
+                <a:cs typeface="Calibri"/>
+              </a:rPr>
+              <a:t>fram</a:t>
+            </a:r>
+            <a:r>
+              <a:rPr sz="1700" b="1">
+                <a:solidFill>
+                  <a:srgbClr val="064F91"/>
+                </a:solidFill>
+                <a:latin typeface="Calibri"/>
+                <a:ea typeface="Calibri"/>
+                <a:cs typeface="Calibri"/>
+              </a:rPr>
+              <a:t> = </a:t>
+            </a:r>
+            <a:r>
+              <a:rPr sz="1700" b="1">
+                <a:solidFill>
+                  <a:srgbClr val="064F91"/>
+                </a:solidFill>
+                <a:latin typeface="Calibri"/>
+                <a:ea typeface="Calibri"/>
+                <a:cs typeface="Calibri"/>
+              </a:rPr>
+              <a:t>U</a:t>
+            </a:r>
+            <a:r>
+              <a:rPr sz="1700" b="1" baseline="-25000">
+                <a:solidFill>
+                  <a:srgbClr val="064F91"/>
+                </a:solidFill>
+                <a:latin typeface="Calibri"/>
+                <a:ea typeface="Calibri"/>
+                <a:cs typeface="Calibri"/>
+              </a:rPr>
+              <a:t>källa</a:t>
+            </a:r>
+            <a:r>
+              <a:rPr sz="1700" b="1">
+                <a:solidFill>
+                  <a:srgbClr val="064F91"/>
+                </a:solidFill>
+                <a:latin typeface="Calibri"/>
+                <a:ea typeface="Calibri"/>
+                <a:cs typeface="Calibri"/>
+              </a:rPr>
+              <a:t> − </a:t>
+            </a:r>
+            <a:r>
+              <a:rPr sz="1700" b="1">
+                <a:solidFill>
+                  <a:srgbClr val="064F91"/>
+                </a:solidFill>
+                <a:latin typeface="Calibri"/>
+                <a:ea typeface="Calibri"/>
+                <a:cs typeface="Calibri"/>
+              </a:rPr>
+              <a:t>U</a:t>
+            </a:r>
+            <a:r>
+              <a:rPr sz="1700" b="1" baseline="-25000">
+                <a:solidFill>
+                  <a:srgbClr val="064F91"/>
+                </a:solidFill>
+                <a:latin typeface="Calibri"/>
+                <a:ea typeface="Calibri"/>
+                <a:cs typeface="Calibri"/>
+              </a:rPr>
+              <a:t>last</a:t>
+            </a:r>
+            <a:r>
+              <a:rPr sz="1700" b="1">
+                <a:solidFill>
+                  <a:srgbClr val="064F91"/>
+                </a:solidFill>
+                <a:latin typeface="Calibri"/>
+                <a:ea typeface="Calibri"/>
+                <a:cs typeface="Calibri"/>
+              </a:rPr>
+              <a:t> − </a:t>
+            </a:r>
+            <a:r>
+              <a:rPr sz="1700" b="1">
+                <a:solidFill>
+                  <a:srgbClr val="064F91"/>
+                </a:solidFill>
+                <a:latin typeface="Calibri"/>
+                <a:ea typeface="Calibri"/>
+                <a:cs typeface="Calibri"/>
+              </a:rPr>
+              <a:t>ΔU</a:t>
+            </a:r>
+            <a:r>
+              <a:rPr sz="1700" b="1" baseline="-25000">
+                <a:solidFill>
+                  <a:srgbClr val="064F91"/>
+                </a:solidFill>
+                <a:latin typeface="Calibri"/>
+                <a:ea typeface="Calibri"/>
+                <a:cs typeface="Calibri"/>
+              </a:rPr>
+              <a:t>retur</a:t>
             </a:r>
           </a:p>
           <a:p xmlns:a="http://schemas.openxmlformats.org/drawingml/2006/main">
@@ -9476,7 +10083,7 @@
               </a:defRPr>
             </a:pPr>
             <a:r>
-              <a:rPr sz="2325" b="1">
+              <a:rPr sz="1700" b="1">
                 <a:solidFill>
                   <a:srgbClr val="064F91"/>
                 </a:solidFill>
@@ -9484,7 +10091,7 @@
                 <a:ea typeface="Calibri"/>
                 <a:cs typeface="Calibri"/>
               </a:rPr>
-              <a:t>R = ΔU/I</a:t>
+              <a:t>R = ΔU/I</a:t>
             </a:r>
           </a:p>
         </p:txBody>
@@ -9506,7 +10113,7 @@
         <p:spPr>
           <a:xfrm xmlns:a="http://schemas.openxmlformats.org/drawingml/2006/main">
             <a:off x="762000" y="3657600"/>
-            <a:ext cx="7620000" cy="1524000"/>
+            <a:ext cx="3977639" cy="1524000"/>
           </a:xfrm>
           <a:prstGeom xmlns:a="http://schemas.openxmlformats.org/drawingml/2006/main" prst="rect">
             <a:avLst/>
@@ -9533,15 +10140,15 @@
               </a:defRPr>
             </a:pPr>
             <a:r>
-              <a:rPr sz="2063" b="0">
-                <a:solidFill>
-                  <a:srgbClr val="111111"/>
-                </a:solidFill>
-                <a:latin typeface="Calibri"/>
-                <a:ea typeface="Calibri"/>
-                <a:cs typeface="Calibri"/>
-              </a:rPr>
-              <a:t>1. Totalt fall = 12 − 9 = 3 V.</a:t>
+              <a:rPr sz="1950" b="0">
+                <a:solidFill>
+                  <a:srgbClr val="111111"/>
+                </a:solidFill>
+                <a:latin typeface="Calibri"/>
+                <a:ea typeface="Calibri"/>
+                <a:cs typeface="Calibri"/>
+              </a:rPr>
+              <a:t>1. Totalt fall = 12 − 9 = 3 V.</a:t>
             </a:r>
           </a:p>
           <a:p xmlns:a="http://schemas.openxmlformats.org/drawingml/2006/main">
@@ -9556,15 +10163,48 @@
               </a:defRPr>
             </a:pPr>
             <a:r>
-              <a:rPr sz="2063" b="0">
-                <a:solidFill>
-                  <a:srgbClr val="111111"/>
-                </a:solidFill>
-                <a:latin typeface="Calibri"/>
-                <a:ea typeface="Calibri"/>
-                <a:cs typeface="Calibri"/>
-              </a:rPr>
-              <a:t>2. Framfall = 3 − 0,75 = 2,25 V. Rfram = 2,25/1,5 = 1,5 Ω.</a:t>
+              <a:rPr sz="1950" b="0">
+                <a:solidFill>
+                  <a:srgbClr val="111111"/>
+                </a:solidFill>
+                <a:latin typeface="Calibri"/>
+                <a:ea typeface="Calibri"/>
+                <a:cs typeface="Calibri"/>
+              </a:rPr>
+              <a:t>2. Framfall = 3 − 0,75 = 2,25 V. </a:t>
+            </a:r>
+            <a:r>
+              <a:rPr sz="1950" b="0">
+                <a:solidFill>
+                  <a:srgbClr val="111111"/>
+                </a:solidFill>
+                <a:latin typeface="Calibri"/>
+                <a:ea typeface="Calibri"/>
+                <a:cs typeface="Calibri"/>
+              </a:rPr>
+              <a:t>R</a:t>
+            </a:r>
+            <a:r>
+              <a:rPr sz="1950" b="0" baseline="-25000">
+                <a:solidFill>
+                  <a:srgbClr val="111111"/>
+                </a:solidFill>
+                <a:latin typeface="Calibri"/>
+                <a:ea typeface="Calibri"/>
+                <a:cs typeface="Calibri"/>
+              </a:rPr>
+              <a:t>fram</a:t>
+            </a:r>
+            <a:r>
+              <a:rPr sz="1950" b="0">
+                <a:solidFill>
+                  <a:srgbClr val="111111"/>
+                </a:solidFill>
+                <a:latin typeface="Calibri"/>
+                <a:ea typeface="Calibri"/>
+                <a:cs typeface="Calibri"/>
+              </a:rPr>
+              <a:t> = 2,25/1,5 = 1,5 Ω.</a:t>
             </a:r>
           </a:p>
           <a:p xmlns:a="http://schemas.openxmlformats.org/drawingml/2006/main">
@@ -9579,15 +10219,48 @@
               </a:defRPr>
             </a:pPr>
             <a:r>
-              <a:rPr sz="2063" b="0">
-                <a:solidFill>
-                  <a:srgbClr val="111111"/>
-                </a:solidFill>
-                <a:latin typeface="Calibri"/>
-                <a:ea typeface="Calibri"/>
-                <a:cs typeface="Calibri"/>
-              </a:rPr>
-              <a:t>3. Rretur = 0,75/1,5 = 0,5 Ω.</a:t>
+              <a:rPr sz="1950" b="0">
+                <a:solidFill>
+                  <a:srgbClr val="111111"/>
+                </a:solidFill>
+                <a:latin typeface="Calibri"/>
+                <a:ea typeface="Calibri"/>
+                <a:cs typeface="Calibri"/>
+              </a:rPr>
+              <a:t>3. </a:t>
+            </a:r>
+            <a:r>
+              <a:rPr sz="1950" b="0">
+                <a:solidFill>
+                  <a:srgbClr val="111111"/>
+                </a:solidFill>
+                <a:latin typeface="Calibri"/>
+                <a:ea typeface="Calibri"/>
+                <a:cs typeface="Calibri"/>
+              </a:rPr>
+              <a:t>R</a:t>
+            </a:r>
+            <a:r>
+              <a:rPr sz="1950" b="0" baseline="-25000">
+                <a:solidFill>
+                  <a:srgbClr val="111111"/>
+                </a:solidFill>
+                <a:latin typeface="Calibri"/>
+                <a:ea typeface="Calibri"/>
+                <a:cs typeface="Calibri"/>
+              </a:rPr>
+              <a:t>retur</a:t>
+            </a:r>
+            <a:r>
+              <a:rPr sz="1950" b="0">
+                <a:solidFill>
+                  <a:srgbClr val="111111"/>
+                </a:solidFill>
+                <a:latin typeface="Calibri"/>
+                <a:ea typeface="Calibri"/>
+                <a:cs typeface="Calibri"/>
+              </a:rPr>
+              <a:t> = 0,75/1,5 = 0,5 Ω.</a:t>
             </a:r>
           </a:p>
         </p:txBody>
@@ -9609,7 +10282,7 @@
         <p:spPr>
           <a:xfrm xmlns:a="http://schemas.openxmlformats.org/drawingml/2006/main">
             <a:off x="762000" y="5372100"/>
-            <a:ext cx="7620000" cy="685800"/>
+            <a:ext cx="3977639" cy="685800"/>
           </a:xfrm>
           <a:prstGeom xmlns:a="http://schemas.openxmlformats.org/drawingml/2006/main" prst="rect">
             <a:avLst/>
@@ -9636,15 +10309,15 @@
               </a:defRPr>
             </a:pPr>
             <a:r>
-              <a:rPr sz="1913" b="0">
-                <a:solidFill>
-                  <a:srgbClr val="111111"/>
-                </a:solidFill>
-                <a:latin typeface="Calibri"/>
-                <a:ea typeface="Calibri"/>
-                <a:cs typeface="Calibri"/>
-              </a:rPr>
-              <a:t>Kontroll: (1,5 + 0,5) Ω · 1,5 A = 3 V. Beräkningen lokaliserar fall till två delar.</a:t>
+              <a:rPr sz="1550" b="0">
+                <a:solidFill>
+                  <a:srgbClr val="111111"/>
+                </a:solidFill>
+                <a:latin typeface="Calibri"/>
+                <a:ea typeface="Calibri"/>
+                <a:cs typeface="Calibri"/>
+              </a:rPr>
+              <a:t>Kontroll: (1,5 + 0,5) Ω · 1,5 A = 3 V. Beräkningen lokaliserar fall till två delar.</a:t>
             </a:r>
           </a:p>
         </p:txBody>
@@ -9706,6 +10379,30 @@
           </a:p>
         </p:txBody>
       </p:sp>
+      <p:pic xmlns:a="http://schemas.openxmlformats.org/drawingml/2006/main" xmlns:r="http://schemas.openxmlformats.org/officeDocument/2006/relationships">
+        <p:nvPicPr>
+          <p:cNvPr id="16" name="Figur: Seriekrets: källa 12 V, last 9 V, ström " descr="Seriekrets: källa 12 V, last 9 V, ström 1,5 A; framledningen tappar 2,25 V och returen 0,75 V"/>
+          <p:cNvPicPr>
+            <a:picLocks noChangeAspect="1"/>
+          </p:cNvPicPr>
+          <p:nvPr/>
+        </p:nvPicPr>
+        <p:blipFill>
+          <a:blip r:embed="rId3"/>
+          <a:stretch>
+            <a:fillRect/>
+          </a:stretch>
+        </p:blipFill>
+        <p:spPr>
+          <a:xfrm>
+            <a:off x="4892040" y="1645920"/>
+            <a:ext cx="3886200" cy="2709112"/>
+          </a:xfrm>
+          <a:prstGeom prst="rect">
+            <a:avLst/>
+          </a:prstGeom>
+        </p:spPr>
+      </p:pic>
     </p:spTree>
     <p:extLst>
       <p:ext uri="{BB962C8B-B14F-4D97-AF65-F5344CB8AC3E}">
@@ -9861,7 +10558,84 @@
                 <a:ea typeface="Calibri"/>
                 <a:cs typeface="Calibri"/>
               </a:rPr>
-              <a:t>Ukälla = Ulast + ΔUkabel</a:t>
+              <a:t>U</a:t>
+            </a:r>
+            <a:r>
+              <a:rPr sz="2400" b="1" baseline="-25000">
+                <a:solidFill>
+                  <a:srgbClr val="064F91"/>
+                </a:solidFill>
+                <a:latin typeface="Calibri"/>
+                <a:ea typeface="Calibri"/>
+                <a:cs typeface="Calibri"/>
+              </a:rPr>
+              <a:t>källa</a:t>
+            </a:r>
+            <a:r>
+              <a:rPr sz="2400" b="1">
+                <a:solidFill>
+                  <a:srgbClr val="064F91"/>
+                </a:solidFill>
+                <a:latin typeface="Calibri"/>
+                <a:ea typeface="Calibri"/>
+                <a:cs typeface="Calibri"/>
+              </a:rPr>
+              <a:t> = </a:t>
+            </a:r>
+            <a:r>
+              <a:rPr sz="2400" b="1">
+                <a:solidFill>
+                  <a:srgbClr val="064F91"/>
+                </a:solidFill>
+                <a:latin typeface="Calibri"/>
+                <a:ea typeface="Calibri"/>
+                <a:cs typeface="Calibri"/>
+              </a:rPr>
+              <a:t>U</a:t>
+            </a:r>
+            <a:r>
+              <a:rPr sz="2400" b="1" baseline="-25000">
+                <a:solidFill>
+                  <a:srgbClr val="064F91"/>
+                </a:solidFill>
+                <a:latin typeface="Calibri"/>
+                <a:ea typeface="Calibri"/>
+                <a:cs typeface="Calibri"/>
+              </a:rPr>
+              <a:t>last</a:t>
+            </a:r>
+            <a:r>
+              <a:rPr sz="2400" b="1">
+                <a:solidFill>
+                  <a:srgbClr val="064F91"/>
+                </a:solidFill>
+                <a:latin typeface="Calibri"/>
+                <a:ea typeface="Calibri"/>
+                <a:cs typeface="Calibri"/>
+              </a:rPr>
+              <a:t> + </a:t>
+            </a:r>
+            <a:r>
+              <a:rPr sz="2400" b="1">
+                <a:solidFill>
+                  <a:srgbClr val="064F91"/>
+                </a:solidFill>
+                <a:latin typeface="Calibri"/>
+                <a:ea typeface="Calibri"/>
+                <a:cs typeface="Calibri"/>
+              </a:rPr>
+              <a:t>ΔU</a:t>
+            </a:r>
+            <a:r>
+              <a:rPr sz="2400" b="1" baseline="-25000">
+                <a:solidFill>
+                  <a:srgbClr val="064F91"/>
+                </a:solidFill>
+                <a:latin typeface="Calibri"/>
+                <a:ea typeface="Calibri"/>
+                <a:cs typeface="Calibri"/>
+              </a:rPr>
+              <a:t>kabel</a:t>
             </a:r>
           </a:p>
         </p:txBody>
@@ -13271,7 +14045,128 @@
                 <a:ea typeface="Calibri"/>
                 <a:cs typeface="Calibri"/>
               </a:rPr>
-              <a:t>Rföre = ΔUföre/I     Refter = ΔUefter/I</a:t>
+              <a:t>R</a:t>
+            </a:r>
+            <a:r>
+              <a:rPr sz="2400" b="1" baseline="-25000">
+                <a:solidFill>
+                  <a:srgbClr val="064F91"/>
+                </a:solidFill>
+                <a:latin typeface="Calibri"/>
+                <a:ea typeface="Calibri"/>
+                <a:cs typeface="Calibri"/>
+              </a:rPr>
+              <a:t>före</a:t>
+            </a:r>
+            <a:r>
+              <a:rPr sz="2400" b="1">
+                <a:solidFill>
+                  <a:srgbClr val="064F91"/>
+                </a:solidFill>
+                <a:latin typeface="Calibri"/>
+                <a:ea typeface="Calibri"/>
+                <a:cs typeface="Calibri"/>
+              </a:rPr>
+              <a:t> = </a:t>
+            </a:r>
+            <a:r>
+              <a:rPr sz="2400" b="1">
+                <a:solidFill>
+                  <a:srgbClr val="064F91"/>
+                </a:solidFill>
+                <a:latin typeface="Calibri"/>
+                <a:ea typeface="Calibri"/>
+                <a:cs typeface="Calibri"/>
+              </a:rPr>
+              <a:t>ΔU</a:t>
+            </a:r>
+            <a:r>
+              <a:rPr sz="2400" b="1" baseline="-25000">
+                <a:solidFill>
+                  <a:srgbClr val="064F91"/>
+                </a:solidFill>
+                <a:latin typeface="Calibri"/>
+                <a:ea typeface="Calibri"/>
+                <a:cs typeface="Calibri"/>
+              </a:rPr>
+              <a:t>före</a:t>
+            </a:r>
+            <a:r>
+              <a:rPr sz="2400" b="1">
+                <a:solidFill>
+                  <a:srgbClr val="064F91"/>
+                </a:solidFill>
+                <a:latin typeface="Calibri"/>
+                <a:ea typeface="Calibri"/>
+                <a:cs typeface="Calibri"/>
+              </a:rPr>
+              <a:t>/I     </a:t>
+            </a:r>
+            <a:r>
+              <a:rPr sz="2400" b="1">
+                <a:solidFill>
+                  <a:srgbClr val="064F91"/>
+                </a:solidFill>
+                <a:latin typeface="Calibri"/>
+                <a:ea typeface="Calibri"/>
+                <a:cs typeface="Calibri"/>
+              </a:rPr>
+              <a:t>R</a:t>
+            </a:r>
+            <a:r>
+              <a:rPr sz="2400" b="1" baseline="-25000">
+                <a:solidFill>
+                  <a:srgbClr val="064F91"/>
+                </a:solidFill>
+                <a:latin typeface="Calibri"/>
+                <a:ea typeface="Calibri"/>
+                <a:cs typeface="Calibri"/>
+              </a:rPr>
+              <a:t>efter</a:t>
+            </a:r>
+            <a:r>
+              <a:rPr sz="2400" b="1">
+                <a:solidFill>
+                  <a:srgbClr val="064F91"/>
+                </a:solidFill>
+                <a:latin typeface="Calibri"/>
+                <a:ea typeface="Calibri"/>
+                <a:cs typeface="Calibri"/>
+              </a:rPr>
+              <a:t> = </a:t>
+            </a:r>
+            <a:r>
+              <a:rPr sz="2400" b="1">
+                <a:solidFill>
+                  <a:srgbClr val="064F91"/>
+                </a:solidFill>
+                <a:latin typeface="Calibri"/>
+                <a:ea typeface="Calibri"/>
+                <a:cs typeface="Calibri"/>
+              </a:rPr>
+              <a:t>ΔU</a:t>
+            </a:r>
+            <a:r>
+              <a:rPr sz="2400" b="1" baseline="-25000">
+                <a:solidFill>
+                  <a:srgbClr val="064F91"/>
+                </a:solidFill>
+                <a:latin typeface="Calibri"/>
+                <a:ea typeface="Calibri"/>
+                <a:cs typeface="Calibri"/>
+              </a:rPr>
+              <a:t>efter</a:t>
+            </a:r>
+            <a:r>
+              <a:rPr sz="2400" b="1">
+                <a:solidFill>
+                  <a:srgbClr val="064F91"/>
+                </a:solidFill>
+                <a:latin typeface="Calibri"/>
+                <a:ea typeface="Calibri"/>
+                <a:cs typeface="Calibri"/>
+              </a:rPr>
+              <a:t>/I</a:t>
             </a:r>
           </a:p>
         </p:txBody>
@@ -14483,64 +15378,6 @@
       </p:sp>
       <p:sp>
         <p:nvSpPr>
-          <p:cNvPr id="7" name="Källor och lärarstöd finns även i bildanteckningarna.">
-            <a:extLst xmlns:a="http://schemas.openxmlformats.org/drawingml/2006/main">
-              <a:ext uri="{FF2B5EF4-FFF2-40B4-BE49-F238E27FC236}">
-                <a16:creationId xmlns:a16="http://schemas.microsoft.com/office/drawing/2014/main" id="{B2A57828-7A1D-4FE8-A624-6090C2DE3603}"/>
-              </a:ext>
-            </a:extLst>
-          </p:cNvPr>
-          <p:cNvSpPr>
-            <a:spLocks xmlns:a="http://schemas.openxmlformats.org/drawingml/2006/main" noGrp="1"/>
-          </p:cNvSpPr>
-          <p:nvPr/>
-        </p:nvSpPr>
-        <p:spPr>
-          <a:xfrm xmlns:a="http://schemas.openxmlformats.org/drawingml/2006/main">
-            <a:off x="762000" y="5676900"/>
-            <a:ext cx="7620000" cy="352425"/>
-          </a:xfrm>
-          <a:prstGeom xmlns:a="http://schemas.openxmlformats.org/drawingml/2006/main" prst="rect">
-            <a:avLst/>
-          </a:prstGeom>
-          <a:noFill xmlns:a="http://schemas.openxmlformats.org/drawingml/2006/main"/>
-          <a:ln xmlns:a="http://schemas.openxmlformats.org/drawingml/2006/main" w="0">
-            <a:noFill/>
-          </a:ln>
-        </p:spPr>
-        <p:txBody>
-          <a:bodyPr xmlns:a="http://schemas.openxmlformats.org/drawingml/2006/main" wrap="square" lIns="0" tIns="0" rIns="0" bIns="0" anchor="t">
-            <a:noAutofit/>
-          </a:bodyPr>
-          <a:lstStyle xmlns:a="http://schemas.openxmlformats.org/drawingml/2006/main"/>
-          <a:p xmlns:a="http://schemas.openxmlformats.org/drawingml/2006/main">
-            <a:pPr algn="l">
-              <a:buNone/>
-              <a:defRPr sz="1800" b="0">
-                <a:solidFill>
-                  <a:srgbClr val="111111"/>
-                </a:solidFill>
-                <a:latin typeface="Calibri"/>
-                <a:ea typeface="Calibri"/>
-                <a:cs typeface="Calibri"/>
-              </a:defRPr>
-            </a:pPr>
-            <a:r>
-              <a:rPr sz="1800" b="0">
-                <a:solidFill>
-                  <a:srgbClr val="111111"/>
-                </a:solidFill>
-                <a:latin typeface="Calibri"/>
-                <a:ea typeface="Calibri"/>
-                <a:cs typeface="Calibri"/>
-              </a:rPr>
-              <a:t>Källor och lärarstöd finns även i bildanteckningarna.</a:t>
-            </a:r>
-          </a:p>
-        </p:txBody>
-      </p:sp>
-      <p:sp>
-        <p:nvSpPr>
           <p:cNvPr id="8" name="22">
             <a:extLst xmlns:a="http://schemas.openxmlformats.org/drawingml/2006/main">
               <a:ext uri="{FF2B5EF4-FFF2-40B4-BE49-F238E27FC236}">
@@ -16015,7 +16852,7 @@
         <p:spPr>
           <a:xfrm xmlns:a="http://schemas.openxmlformats.org/drawingml/2006/main">
             <a:off x="762000" y="1619250"/>
-            <a:ext cx="7620000" cy="1466850"/>
+            <a:ext cx="3977639" cy="1466850"/>
           </a:xfrm>
           <a:prstGeom xmlns:a="http://schemas.openxmlformats.org/drawingml/2006/main" prst="rect">
             <a:avLst/>
@@ -16043,7 +16880,7 @@
               </a:defRPr>
             </a:pPr>
             <a:r>
-              <a:rPr sz="2400" b="0">
+              <a:rPr sz="1950" b="0">
                 <a:solidFill>
                   <a:srgbClr val="111111"/>
                 </a:solidFill>
@@ -16067,7 +16904,7 @@
               </a:defRPr>
             </a:pPr>
             <a:r>
-              <a:rPr sz="2400" b="0">
+              <a:rPr sz="1950" b="0">
                 <a:solidFill>
                   <a:srgbClr val="111111"/>
                 </a:solidFill>
@@ -16097,7 +16934,7 @@
         <p:spPr>
           <a:xfrm xmlns:a="http://schemas.openxmlformats.org/drawingml/2006/main">
             <a:off x="762000" y="3200400"/>
-            <a:ext cx="7620000" cy="838200"/>
+            <a:ext cx="3977639" cy="838200"/>
           </a:xfrm>
           <a:prstGeom xmlns:a="http://schemas.openxmlformats.org/drawingml/2006/main" prst="rect">
             <a:avLst/>
@@ -16125,7 +16962,7 @@
               </a:defRPr>
             </a:pPr>
             <a:r>
-              <a:rPr sz="2925" b="1">
+              <a:rPr sz="2650" b="1">
                 <a:solidFill>
                   <a:srgbClr val="064F91"/>
                 </a:solidFill>
@@ -16155,7 +16992,7 @@
         <p:spPr>
           <a:xfrm xmlns:a="http://schemas.openxmlformats.org/drawingml/2006/main">
             <a:off x="762000" y="4429125"/>
-            <a:ext cx="7620000" cy="1352550"/>
+            <a:ext cx="3977639" cy="1352550"/>
           </a:xfrm>
           <a:prstGeom xmlns:a="http://schemas.openxmlformats.org/drawingml/2006/main" prst="rect">
             <a:avLst/>
@@ -16183,15 +17020,15 @@
               </a:defRPr>
             </a:pPr>
             <a:r>
-              <a:rPr sz="2250" b="0">
-                <a:solidFill>
-                  <a:srgbClr val="111111"/>
-                </a:solidFill>
-                <a:latin typeface="Calibri"/>
-                <a:ea typeface="Calibri"/>
-                <a:cs typeface="Calibri"/>
-              </a:rPr>
-              <a:t>Krav 11,4–12,6 V, mätning 11,45 ±0,10 V:</a:t>
+              <a:rPr sz="2100" b="0">
+                <a:solidFill>
+                  <a:srgbClr val="111111"/>
+                </a:solidFill>
+                <a:latin typeface="Calibri"/>
+                <a:ea typeface="Calibri"/>
+                <a:cs typeface="Calibri"/>
+              </a:rPr>
+              <a:t>Krav 23,0–25,0 V, mätning 23,10 ±0,15 V:</a:t>
             </a:r>
           </a:p>
           <a:p xmlns:a="http://schemas.openxmlformats.org/drawingml/2006/main">
@@ -16207,15 +17044,15 @@
               </a:defRPr>
             </a:pPr>
             <a:r>
-              <a:rPr sz="2250" b="0">
-                <a:solidFill>
-                  <a:srgbClr val="111111"/>
-                </a:solidFill>
-                <a:latin typeface="Calibri"/>
-                <a:ea typeface="Calibri"/>
-                <a:cs typeface="Calibri"/>
-              </a:rPr>
-              <a:t>intervallet 11,35–11,55 V går utanför kravet.</a:t>
+              <a:rPr sz="2100" b="0">
+                <a:solidFill>
+                  <a:srgbClr val="111111"/>
+                </a:solidFill>
+                <a:latin typeface="Calibri"/>
+                <a:ea typeface="Calibri"/>
+                <a:cs typeface="Calibri"/>
+              </a:rPr>
+              <a:t>intervallet 22,95–23,25 V går utanför kravet.</a:t>
             </a:r>
           </a:p>
         </p:txBody>
@@ -16278,6 +17115,30 @@
           </a:p>
         </p:txBody>
       </p:sp>
+      <p:pic xmlns:a="http://schemas.openxmlformats.org/drawingml/2006/main" xmlns:r="http://schemas.openxmlformats.org/officeDocument/2006/relationships">
+        <p:nvPicPr>
+          <p:cNvPr id="9" name="Figur: Kravintervall 23,00–25,00 V och mätinter" descr="Kravintervall 23,00–25,00 V och mätintervall 22,95–23,25 V som går under kravets nedre gräns"/>
+          <p:cNvPicPr>
+            <a:picLocks noChangeAspect="1"/>
+          </p:cNvPicPr>
+          <p:nvPr/>
+        </p:nvPicPr>
+        <p:blipFill>
+          <a:blip r:embed="rId3"/>
+          <a:stretch>
+            <a:fillRect/>
+          </a:stretch>
+        </p:blipFill>
+        <p:spPr>
+          <a:xfrm>
+            <a:off x="4892040" y="1645920"/>
+            <a:ext cx="3886200" cy="2346931"/>
+          </a:xfrm>
+          <a:prstGeom prst="rect">
+            <a:avLst/>
+          </a:prstGeom>
+        </p:spPr>
+      </p:pic>
     </p:spTree>
     <p:extLst>
       <p:ext uri="{BB962C8B-B14F-4D97-AF65-F5344CB8AC3E}">
@@ -16575,7 +17436,7 @@
                 <a:ea typeface="Calibri"/>
                 <a:cs typeface="Calibri"/>
               </a:rPr>
-              <a:t>Normal källa, stort kabelspänningsfall och låg lastspänning</a:t>
+              <a:t>Pröva varje hypotes mot alla mätvärden,</a:t>
             </a:r>
           </a:p>
           <a:p xmlns:a="http://schemas.openxmlformats.org/drawingml/2006/main">
@@ -16599,7 +17460,7 @@
                 <a:ea typeface="Calibri"/>
                 <a:cs typeface="Calibri"/>
               </a:rPr>
-              <a:t>stödjer fel i matningsvägen mer än fel i själva källan.</a:t>
+              <a:t>inte bara mot det första symtomet.</a:t>
             </a:r>
           </a:p>
         </p:txBody>
@@ -16782,7 +17643,7 @@
         <p:spPr>
           <a:xfrm xmlns:a="http://schemas.openxmlformats.org/drawingml/2006/main">
             <a:off x="762000" y="1571625"/>
-            <a:ext cx="7620000" cy="990600"/>
+            <a:ext cx="3977639" cy="990600"/>
           </a:xfrm>
           <a:prstGeom xmlns:a="http://schemas.openxmlformats.org/drawingml/2006/main" prst="rect">
             <a:avLst/>
@@ -16809,15 +17670,15 @@
               </a:defRPr>
             </a:pPr>
             <a:r>
-              <a:rPr sz="2175" b="0">
-                <a:solidFill>
-                  <a:srgbClr val="111111"/>
-                </a:solidFill>
-                <a:latin typeface="Calibri"/>
-                <a:ea typeface="Calibri"/>
-                <a:cs typeface="Calibri"/>
-              </a:rPr>
-              <a:t>Krav 20,0 V ±2 %. Mätning 19,70 V ±0,15 V. Hela mätintervallet måste ligga inom kravet.</a:t>
+              <a:rPr sz="1900" b="0">
+                <a:solidFill>
+                  <a:srgbClr val="111111"/>
+                </a:solidFill>
+                <a:latin typeface="Calibri"/>
+                <a:ea typeface="Calibri"/>
+                <a:cs typeface="Calibri"/>
+              </a:rPr>
+              <a:t>Krav 20,0 V ±2 %. Mätning 19,70 V ±0,15 V. Hela mätintervallet måste ligga inom kravet.</a:t>
             </a:r>
           </a:p>
         </p:txBody>
@@ -16839,7 +17700,7 @@
         <p:spPr>
           <a:xfrm xmlns:a="http://schemas.openxmlformats.org/drawingml/2006/main">
             <a:off x="762000" y="2705100"/>
-            <a:ext cx="7620000" cy="790575"/>
+            <a:ext cx="3977639" cy="790575"/>
           </a:xfrm>
           <a:prstGeom xmlns:a="http://schemas.openxmlformats.org/drawingml/2006/main" prst="rect">
             <a:avLst/>
@@ -16866,7 +17727,7 @@
               </a:defRPr>
             </a:pPr>
             <a:r>
-              <a:rPr sz="2325" b="1">
+              <a:rPr sz="2200" b="1">
                 <a:solidFill>
                   <a:srgbClr val="064F91"/>
                 </a:solidFill>
@@ -16874,7 +17735,7 @@
                 <a:ea typeface="Calibri"/>
                 <a:cs typeface="Calibri"/>
               </a:rPr>
-              <a:t>Krav = 20,0 · (1 ± 0,02)</a:t>
+              <a:t>Krav = 20,0 · (1 ± 0,02)</a:t>
             </a:r>
           </a:p>
           <a:p xmlns:a="http://schemas.openxmlformats.org/drawingml/2006/main">
@@ -16889,7 +17750,7 @@
               </a:defRPr>
             </a:pPr>
             <a:r>
-              <a:rPr sz="2325" b="1">
+              <a:rPr sz="2200" b="1">
                 <a:solidFill>
                   <a:srgbClr val="064F91"/>
                 </a:solidFill>
@@ -16897,7 +17758,7 @@
                 <a:ea typeface="Calibri"/>
                 <a:cs typeface="Calibri"/>
               </a:rPr>
-              <a:t>Mätintervall = 19,70 ±0,15</a:t>
+              <a:t>Mätintervall = 19,70 ±0,15</a:t>
             </a:r>
           </a:p>
         </p:txBody>
@@ -16919,7 +17780,7 @@
         <p:spPr>
           <a:xfrm xmlns:a="http://schemas.openxmlformats.org/drawingml/2006/main">
             <a:off x="762000" y="3657600"/>
-            <a:ext cx="7620000" cy="1524000"/>
+            <a:ext cx="3977639" cy="1524000"/>
           </a:xfrm>
           <a:prstGeom xmlns:a="http://schemas.openxmlformats.org/drawingml/2006/main" prst="rect">
             <a:avLst/>
@@ -16946,15 +17807,15 @@
               </a:defRPr>
             </a:pPr>
             <a:r>
-              <a:rPr sz="2063" b="0">
-                <a:solidFill>
-                  <a:srgbClr val="111111"/>
-                </a:solidFill>
-                <a:latin typeface="Calibri"/>
-                <a:ea typeface="Calibri"/>
-                <a:cs typeface="Calibri"/>
-              </a:rPr>
-              <a:t>1. Krav: 19,60–20,40 V.</a:t>
+              <a:rPr sz="1900" b="0">
+                <a:solidFill>
+                  <a:srgbClr val="111111"/>
+                </a:solidFill>
+                <a:latin typeface="Calibri"/>
+                <a:ea typeface="Calibri"/>
+                <a:cs typeface="Calibri"/>
+              </a:rPr>
+              <a:t>1. Krav: 19,60–20,40 V.</a:t>
             </a:r>
           </a:p>
           <a:p xmlns:a="http://schemas.openxmlformats.org/drawingml/2006/main">
@@ -16969,15 +17830,15 @@
               </a:defRPr>
             </a:pPr>
             <a:r>
-              <a:rPr sz="2063" b="0">
-                <a:solidFill>
-                  <a:srgbClr val="111111"/>
-                </a:solidFill>
-                <a:latin typeface="Calibri"/>
-                <a:ea typeface="Calibri"/>
-                <a:cs typeface="Calibri"/>
-              </a:rPr>
-              <a:t>2. Mätintervall: 19,55–19,85 V.</a:t>
+              <a:rPr sz="1900" b="0">
+                <a:solidFill>
+                  <a:srgbClr val="111111"/>
+                </a:solidFill>
+                <a:latin typeface="Calibri"/>
+                <a:ea typeface="Calibri"/>
+                <a:cs typeface="Calibri"/>
+              </a:rPr>
+              <a:t>2. Mätintervall: 19,55–19,85 V.</a:t>
             </a:r>
           </a:p>
           <a:p xmlns:a="http://schemas.openxmlformats.org/drawingml/2006/main">
@@ -16992,15 +17853,15 @@
               </a:defRPr>
             </a:pPr>
             <a:r>
-              <a:rPr sz="2063" b="0">
-                <a:solidFill>
-                  <a:srgbClr val="111111"/>
-                </a:solidFill>
-                <a:latin typeface="Calibri"/>
-                <a:ea typeface="Calibri"/>
-                <a:cs typeface="Calibri"/>
-              </a:rPr>
-              <a:t>3. Nedre mätgränsen ligger 0,05 V under lägsta kravgränsen.</a:t>
+              <a:rPr sz="1900" b="0">
+                <a:solidFill>
+                  <a:srgbClr val="111111"/>
+                </a:solidFill>
+                <a:latin typeface="Calibri"/>
+                <a:ea typeface="Calibri"/>
+                <a:cs typeface="Calibri"/>
+              </a:rPr>
+              <a:t>3. Nedre mätgränsen ligger 0,05 V under lägsta kravgränsen.</a:t>
             </a:r>
           </a:p>
         </p:txBody>
@@ -17022,7 +17883,7 @@
         <p:spPr>
           <a:xfrm xmlns:a="http://schemas.openxmlformats.org/drawingml/2006/main">
             <a:off x="762000" y="5372100"/>
-            <a:ext cx="7620000" cy="685800"/>
+            <a:ext cx="3977639" cy="685800"/>
           </a:xfrm>
           <a:prstGeom xmlns:a="http://schemas.openxmlformats.org/drawingml/2006/main" prst="rect">
             <a:avLst/>
@@ -17049,7 +17910,7 @@
               </a:defRPr>
             </a:pPr>
             <a:r>
-              <a:rPr sz="1913" b="0">
+              <a:rPr sz="1550" b="0">
                 <a:solidFill>
                   <a:srgbClr val="111111"/>
                 </a:solidFill>
@@ -17119,6 +17980,30 @@
           </a:p>
         </p:txBody>
       </p:sp>
+      <p:pic xmlns:a="http://schemas.openxmlformats.org/drawingml/2006/main" xmlns:r="http://schemas.openxmlformats.org/officeDocument/2006/relationships">
+        <p:nvPicPr>
+          <p:cNvPr id="16" name="Figur: Kravintervall 19,60–20,40 V och mätinter" descr="Kravintervall 19,60–20,40 V och mätintervall 19,55–19,85 V; nedre mätgräns 0,05 V under kravet"/>
+          <p:cNvPicPr>
+            <a:picLocks noChangeAspect="1"/>
+          </p:cNvPicPr>
+          <p:nvPr/>
+        </p:nvPicPr>
+        <p:blipFill>
+          <a:blip r:embed="rId3"/>
+          <a:stretch>
+            <a:fillRect/>
+          </a:stretch>
+        </p:blipFill>
+        <p:spPr>
+          <a:xfrm>
+            <a:off x="4892040" y="1645920"/>
+            <a:ext cx="3886200" cy="2346931"/>
+          </a:xfrm>
+          <a:prstGeom prst="rect">
+            <a:avLst/>
+          </a:prstGeom>
+        </p:spPr>
+      </p:pic>
     </p:spTree>
     <p:extLst>
       <p:ext uri="{BB962C8B-B14F-4D97-AF65-F5344CB8AC3E}">

--- a/sjoskolan/vecka-45/aktuell/v45_02_Analys_av_matresultat_elev.pptx
+++ b/sjoskolan/vecka-45/aktuell/v45_02_Analys_av_matresultat_elev.pptx
@@ -9659,7 +9659,7 @@
                 <a:ea typeface="Calibri"/>
                 <a:cs typeface="Calibri"/>
               </a:rPr>
-              <a:t>Kvarstående fel eller ej utförda kontroller redovisas tydligt.</a:t>
+              <a:t>Ombord: avsluta arbetstillstånd och LOTO, kontrollera isolationsvaktens värde,</a:t>
             </a:r>
           </a:p>
           <a:p xmlns:a="http://schemas.openxmlformats.org/drawingml/2006/main">
@@ -9683,7 +9683,7 @@
                 <a:ea typeface="Calibri"/>
                 <a:cs typeface="Calibri"/>
               </a:rPr>
-              <a:t>”Ej kontrollerat” är mer användbart än ett obefogat ”godkänt”.</a:t>
+              <a:t>informera vakthavande och bryggan, för in åtgärden i maskindagbok och underhållssystem.</a:t>
             </a:r>
           </a:p>
         </p:txBody>
@@ -9901,7 +9901,7 @@
                 <a:ea typeface="Calibri"/>
                 <a:cs typeface="Calibri"/>
               </a:rPr>
-              <a:t>Källa 12 V, last 9 V och ström 1,5 A. Returens fall är 0,75 V. Samtidiga data.</a:t>
+              <a:t>Källa 12 V, last 9 V och ström 1,5 A. Returens fall är 0,9 V. Samtidiga data.</a:t>
             </a:r>
           </a:p>
         </p:txBody>
@@ -10171,7 +10171,7 @@
                 <a:ea typeface="Calibri"/>
                 <a:cs typeface="Calibri"/>
               </a:rPr>
-              <a:t>2. Framfall = 3 − 0,75 = 2,25 V. </a:t>
+              <a:t>2. Framfall = 3 − 0,9 = 2,1 V. </a:t>
             </a:r>
             <a:r>
               <a:rPr sz="1950" b="0">
@@ -10204,7 +10204,7 @@
                 <a:ea typeface="Calibri"/>
                 <a:cs typeface="Calibri"/>
               </a:rPr>
-              <a:t> = 2,25/1,5 = 1,5 Ω.</a:t>
+              <a:t> = 2,1/1,5 = 1,4 Ω.</a:t>
             </a:r>
           </a:p>
           <a:p xmlns:a="http://schemas.openxmlformats.org/drawingml/2006/main">
@@ -10260,7 +10260,7 @@
                 <a:ea typeface="Calibri"/>
                 <a:cs typeface="Calibri"/>
               </a:rPr>
-              <a:t> = 0,75/1,5 = 0,5 Ω.</a:t>
+              <a:t> = 0,9/1,5 = 0,6 Ω.</a:t>
             </a:r>
           </a:p>
         </p:txBody>
@@ -10317,7 +10317,7 @@
                 <a:ea typeface="Calibri"/>
                 <a:cs typeface="Calibri"/>
               </a:rPr>
-              <a:t>Kontroll: (1,5 + 0,5) Ω · 1,5 A = 3 V. Beräkningen lokaliserar fall till två delar.</a:t>
+              <a:t>Kontroll: (1,4 + 0,6) Ω · 1,5 A = 3 V. Beräkningen lokaliserar fall till två delar.</a:t>
             </a:r>
           </a:p>
         </p:txBody>
@@ -10381,7 +10381,7 @@
       </p:sp>
       <p:pic xmlns:a="http://schemas.openxmlformats.org/drawingml/2006/main" xmlns:r="http://schemas.openxmlformats.org/officeDocument/2006/relationships">
         <p:nvPicPr>
-          <p:cNvPr id="16" name="Figur: Seriekrets: källa 12 V, last 9 V, ström " descr="Seriekrets: källa 12 V, last 9 V, ström 1,5 A; framledningen tappar 2,25 V och returen 0,75 V"/>
+          <p:cNvPr id="16" name="Figur: Seriekrets: källa 12 V, last 9 V, ström " descr="Seriekrets: källa 12 V, last 9 V, ström 1,5 A; framledningen tappar 2,1 V och returen 0,9 V"/>
           <p:cNvPicPr>
             <a:picLocks noChangeAspect="1"/>
           </p:cNvPicPr>
@@ -17020,15 +17020,15 @@
               </a:defRPr>
             </a:pPr>
             <a:r>
-              <a:rPr sz="2100" b="0">
-                <a:solidFill>
-                  <a:srgbClr val="111111"/>
-                </a:solidFill>
-                <a:latin typeface="Calibri"/>
-                <a:ea typeface="Calibri"/>
-                <a:cs typeface="Calibri"/>
-              </a:rPr>
-              <a:t>Krav 23,0–25,0 V, mätning 23,10 ±0,15 V:</a:t>
+              <a:rPr sz="1700" b="0">
+                <a:solidFill>
+                  <a:srgbClr val="111111"/>
+                </a:solidFill>
+                <a:latin typeface="Calibri"/>
+                <a:ea typeface="Calibri"/>
+                <a:cs typeface="Calibri"/>
+              </a:rPr>
+              <a:t>Krav 23,0–25,0 V, mätning 24,90 ±0,15 V: intervallet 24,75–25,05 V</a:t>
             </a:r>
           </a:p>
           <a:p xmlns:a="http://schemas.openxmlformats.org/drawingml/2006/main">
@@ -17044,15 +17044,15 @@
               </a:defRPr>
             </a:pPr>
             <a:r>
-              <a:rPr sz="2100" b="0">
-                <a:solidFill>
-                  <a:srgbClr val="111111"/>
-                </a:solidFill>
-                <a:latin typeface="Calibri"/>
-                <a:ea typeface="Calibri"/>
-                <a:cs typeface="Calibri"/>
-              </a:rPr>
-              <a:t>intervallet 22,95–23,25 V går utanför kravet.</a:t>
+              <a:rPr sz="1700" b="0">
+                <a:solidFill>
+                  <a:srgbClr val="111111"/>
+                </a:solidFill>
+                <a:latin typeface="Calibri"/>
+                <a:ea typeface="Calibri"/>
+                <a:cs typeface="Calibri"/>
+              </a:rPr>
+              <a:t>går över kravets övre gräns, så överensstämmelse kan inte visas.</a:t>
             </a:r>
           </a:p>
         </p:txBody>
@@ -17117,7 +17117,7 @@
       </p:sp>
       <p:pic xmlns:a="http://schemas.openxmlformats.org/drawingml/2006/main" xmlns:r="http://schemas.openxmlformats.org/officeDocument/2006/relationships">
         <p:nvPicPr>
-          <p:cNvPr id="9" name="Figur: Kravintervall 23,00–25,00 V och mätinter" descr="Kravintervall 23,00–25,00 V och mätintervall 22,95–23,25 V som går under kravets nedre gräns"/>
+          <p:cNvPr id="9" name="Figur: Kravintervall 23,00–25,00 V och mätinter" descr="Kravintervall 23,00–25,00 V och mätintervall 24,75–25,05 V som går över kravets övre gräns"/>
           <p:cNvPicPr>
             <a:picLocks noChangeAspect="1"/>
           </p:cNvPicPr>
@@ -17678,7 +17678,7 @@
                 <a:ea typeface="Calibri"/>
                 <a:cs typeface="Calibri"/>
               </a:rPr>
-              <a:t>Krav 20,0 V ±2 %. Mätning 19,70 V ±0,15 V. Hela mätintervallet måste ligga inom kravet.</a:t>
+              <a:t>Krav 20,0 V ±2 %. Mätning 19,80 V ±0,15 V. Hela mätintervallet måste ligga inom kravet.</a:t>
             </a:r>
           </a:p>
         </p:txBody>
@@ -17758,7 +17758,7 @@
                 <a:ea typeface="Calibri"/>
                 <a:cs typeface="Calibri"/>
               </a:rPr>
-              <a:t>Mätintervall = 19,70 ±0,15</a:t>
+              <a:t>Mätintervall = 19,80 ±0,15</a:t>
             </a:r>
           </a:p>
         </p:txBody>
@@ -17807,7 +17807,7 @@
               </a:defRPr>
             </a:pPr>
             <a:r>
-              <a:rPr sz="1900" b="0">
+              <a:rPr sz="1800" b="0">
                 <a:solidFill>
                   <a:srgbClr val="111111"/>
                 </a:solidFill>
@@ -17830,15 +17830,15 @@
               </a:defRPr>
             </a:pPr>
             <a:r>
-              <a:rPr sz="1900" b="0">
-                <a:solidFill>
-                  <a:srgbClr val="111111"/>
-                </a:solidFill>
-                <a:latin typeface="Calibri"/>
-                <a:ea typeface="Calibri"/>
-                <a:cs typeface="Calibri"/>
-              </a:rPr>
-              <a:t>2. Mätintervall: 19,55–19,85 V.</a:t>
+              <a:rPr sz="1800" b="0">
+                <a:solidFill>
+                  <a:srgbClr val="111111"/>
+                </a:solidFill>
+                <a:latin typeface="Calibri"/>
+                <a:ea typeface="Calibri"/>
+                <a:cs typeface="Calibri"/>
+              </a:rPr>
+              <a:t>2. Mätintervall: 19,65–19,95 V.</a:t>
             </a:r>
           </a:p>
           <a:p xmlns:a="http://schemas.openxmlformats.org/drawingml/2006/main">
@@ -17853,15 +17853,15 @@
               </a:defRPr>
             </a:pPr>
             <a:r>
-              <a:rPr sz="1900" b="0">
-                <a:solidFill>
-                  <a:srgbClr val="111111"/>
-                </a:solidFill>
-                <a:latin typeface="Calibri"/>
-                <a:ea typeface="Calibri"/>
-                <a:cs typeface="Calibri"/>
-              </a:rPr>
-              <a:t>3. Nedre mätgränsen ligger 0,05 V under lägsta kravgränsen.</a:t>
+              <a:rPr sz="1800" b="0">
+                <a:solidFill>
+                  <a:srgbClr val="111111"/>
+                </a:solidFill>
+                <a:latin typeface="Calibri"/>
+                <a:ea typeface="Calibri"/>
+                <a:cs typeface="Calibri"/>
+              </a:rPr>
+              <a:t>3. Hela mätintervallet ligger inom kravet: överensstämmelse visad.</a:t>
             </a:r>
           </a:p>
         </p:txBody>
@@ -17918,7 +17918,7 @@
                 <a:ea typeface="Calibri"/>
                 <a:cs typeface="Calibri"/>
               </a:rPr>
-              <a:t>Full överensstämmelse är inte visad med den angivna regeln. Det är inte samma sak som säkert bevisat fel.</a:t>
+              <a:t>Med större felgräns eller en annan beslutsregel kan slutsatsen bli en annan.</a:t>
             </a:r>
           </a:p>
         </p:txBody>
@@ -17982,7 +17982,7 @@
       </p:sp>
       <p:pic xmlns:a="http://schemas.openxmlformats.org/drawingml/2006/main" xmlns:r="http://schemas.openxmlformats.org/officeDocument/2006/relationships">
         <p:nvPicPr>
-          <p:cNvPr id="16" name="Figur: Kravintervall 19,60–20,40 V och mätinter" descr="Kravintervall 19,60–20,40 V och mätintervall 19,55–19,85 V; nedre mätgräns 0,05 V under kravet"/>
+          <p:cNvPr id="16" name="Figur: Kravintervall 19,60–20,40 V och mätinter" descr="Kravintervall 19,60–20,40 V och mätintervall 19,65–19,95 V som ligger helt inom kravet"/>
           <p:cNvPicPr>
             <a:picLocks noChangeAspect="1"/>
           </p:cNvPicPr>

--- a/sjoskolan/vecka-45/aktuell/v45_02_Analys_av_matresultat_elev.pptx
+++ b/sjoskolan/vecka-45/aktuell/v45_02_Analys_av_matresultat_elev.pptx
@@ -3899,7 +3899,7 @@
                 <a:ea typeface="Calibri"/>
                 <a:cs typeface="Calibri"/>
               </a:rPr>
-              <a:t>Spänning utan last visar källans tomgångsvärde. Lastförmåga kräver uppgift om ström och spänning under last.</a:t>
+              <a:t>Spänningen utan last visar källans tomgångsspänning. Om källan klarar lasten kan du bara avgöra med ström och spänning under last.</a:t>
             </a:r>
           </a:p>
         </p:txBody>
@@ -4013,7 +4013,7 @@
                 <a:ea typeface="Calibri"/>
                 <a:cs typeface="Calibri"/>
               </a:rPr>
-              <a:t>Arbetsgång: Skriv en slutsats som stöds direkt och en separat fråga som kräver mer data.</a:t>
+              <a:t>Arbetsgång: Skriv en slutsats du kan dra direkt och en fråga som kräver mer data.</a:t>
             </a:r>
           </a:p>
         </p:txBody>
@@ -4290,7 +4290,7 @@
                 <a:ea typeface="Calibri"/>
                 <a:cs typeface="Calibri"/>
               </a:rPr>
-              <a:t>24,0 V mäts vid en källa utan last. Vilken slutsats stöds direkt, och vilken kräver mer data?</a:t>
+              <a:t>Vid en källa utan last mäts 24,0 V. Vilken slutsats kan du dra direkt, och vilken kräver mer data?</a:t>
             </a:r>
           </a:p>
         </p:txBody>
@@ -4712,7 +4712,7 @@
                 <a:ea typeface="Calibri"/>
                 <a:cs typeface="Calibri"/>
               </a:rPr>
-              <a:t>p är tolerans i procent, δ felgräns. Ett ja kräver att hela mätintervallet ligger inom kravintervallet.</a:t>
+              <a:t>p är toleransen i procent och δ felgränsen. Svaret är ja bara om hela mätintervallet ligger inom kravet.</a:t>
             </a:r>
           </a:p>
         </p:txBody>
@@ -4769,7 +4769,18 @@
                 <a:ea typeface="Calibri"/>
                 <a:cs typeface="Calibri"/>
               </a:rPr>
-              <a:t>Förutsättningar: </a:t>
+              <a:t>Förutsättningar: U</a:t>
+            </a:r>
+            <a:r>
+              <a:rPr sz="2025" b="0" baseline="-25000">
+                <a:solidFill>
+                  <a:srgbClr val="111111"/>
+                </a:solidFill>
+                <a:latin typeface="Calibri"/>
+                <a:ea typeface="Calibri"/>
+                <a:cs typeface="Calibri"/>
+              </a:rPr>
+              <a:t>nom</a:t>
             </a:r>
             <a:r>
               <a:rPr sz="2025" b="0">
@@ -4780,7 +4791,7 @@
                 <a:ea typeface="Calibri"/>
                 <a:cs typeface="Calibri"/>
               </a:rPr>
-              <a:t>U</a:t>
+              <a:t> = 12,0 V, p = 5, U</a:t>
             </a:r>
             <a:r>
               <a:rPr sz="2025" b="0" baseline="-25000">
@@ -4791,7 +4802,7 @@
                 <a:ea typeface="Calibri"/>
                 <a:cs typeface="Calibri"/>
               </a:rPr>
-              <a:t>nom</a:t>
+              <a:t>m</a:t>
             </a:r>
             <a:r>
               <a:rPr sz="2025" b="0">
@@ -4802,40 +4813,7 @@
                 <a:ea typeface="Calibri"/>
                 <a:cs typeface="Calibri"/>
               </a:rPr>
-              <a:t> = 12,0 V, p = 5, </a:t>
-            </a:r>
-            <a:r>
-              <a:rPr sz="2025" b="0">
-                <a:solidFill>
-                  <a:srgbClr val="111111"/>
-                </a:solidFill>
-                <a:latin typeface="Calibri"/>
-                <a:ea typeface="Calibri"/>
-                <a:cs typeface="Calibri"/>
-              </a:rPr>
-              <a:t>U</a:t>
-            </a:r>
-            <a:r>
-              <a:rPr sz="2025" b="0" baseline="-25000">
-                <a:solidFill>
-                  <a:srgbClr val="111111"/>
-                </a:solidFill>
-                <a:latin typeface="Calibri"/>
-                <a:ea typeface="Calibri"/>
-                <a:cs typeface="Calibri"/>
-              </a:rPr>
-              <a:t>m</a:t>
-            </a:r>
-            <a:r>
-              <a:rPr sz="2025" b="0">
-                <a:solidFill>
-                  <a:srgbClr val="111111"/>
-                </a:solidFill>
-                <a:latin typeface="Calibri"/>
-                <a:ea typeface="Calibri"/>
-                <a:cs typeface="Calibri"/>
-              </a:rPr>
-              <a:t> = 11,45 V, δ = 0,10 V. Gränsvärden räknas som tillåtna.</a:t>
+              <a:t> = 11,45 V, δ = 0,10 V. Ett värde precis på gränsen är godkänt.</a:t>
             </a:r>
           </a:p>
         </p:txBody>
@@ -4892,7 +4870,7 @@
                 <a:ea typeface="Calibri"/>
                 <a:cs typeface="Calibri"/>
               </a:rPr>
-              <a:t>Arbetsgång: Räkna båda intervallen. Jämför särskilt den lägsta mätgränsen med lägsta kravgränsen.</a:t>
+              <a:t>Arbetsgång: Räkna ut båda intervallen och jämför särskilt de nedre gränserna.</a:t>
             </a:r>
           </a:p>
         </p:txBody>
@@ -5502,7 +5480,7 @@
                 <a:ea typeface="Calibri"/>
                 <a:cs typeface="Calibri"/>
               </a:rPr>
-              <a:t>Överlapp betyder att det finns värden som är förenliga med båda avläsningarnas intervall.</a:t>
+              <a:t>Om intervallen överlappar finns det värden som stämmer med båda instrumenten.</a:t>
             </a:r>
           </a:p>
         </p:txBody>
@@ -5559,7 +5537,7 @@
                 <a:ea typeface="Calibri"/>
                 <a:cs typeface="Calibri"/>
               </a:rPr>
-              <a:t>Förutsättningar: A: 10,00 ±0,10 V. B: 10,12 ±0,10 V. Samma stabila mätobjekt och mätpunkter antas.</a:t>
+              <a:t>Förutsättningar: A: 10,00 ±0,10 V. B: 10,12 ±0,10 V. Båda mäter samma stabila spänning i samma punkter.</a:t>
             </a:r>
           </a:p>
         </p:txBody>
@@ -5616,7 +5594,7 @@
                 <a:ea typeface="Calibri"/>
                 <a:cs typeface="Calibri"/>
               </a:rPr>
-              <a:t>Arbetsgång: Beräkna intervallen och deras gemensamma del. Dra ingen starkare slutsats än jämförelsen medger.</a:t>
+              <a:t>Arbetsgång: Räkna ut intervallen och den del de har gemensamt. Dra ingen starkare slutsats än jämförelsen tillåter.</a:t>
             </a:r>
           </a:p>
         </p:txBody>
@@ -5893,7 +5871,7 @@
                 <a:ea typeface="Calibri"/>
                 <a:cs typeface="Calibri"/>
               </a:rPr>
-              <a:t>A visar 10,00 ±0,10 V och B visar 10,12 ±0,10 V. Är skillnaden ensam ett säkert bevis för fel instrument?</a:t>
+              <a:t>Instrument A visar 10,00 ±0,10 V och B visar 10,12 ±0,10 V. Bevisar skillnaden i sig att ett av instrumenten är fel?</a:t>
             </a:r>
           </a:p>
         </p:txBody>
@@ -6403,7 +6381,7 @@
                 <a:ea typeface="Calibri"/>
                 <a:cs typeface="Calibri"/>
               </a:rPr>
-              <a:t>Slingfallet består av framledningens och returens fall. Alla värden gäller samma strömväg.</a:t>
+              <a:t>Hela spänningsfallet är summan av fallet i framledaren och i returledaren.</a:t>
             </a:r>
           </a:p>
         </p:txBody>
@@ -6460,7 +6438,7 @@
                 <a:ea typeface="Calibri"/>
                 <a:cs typeface="Calibri"/>
               </a:rPr>
-              <a:t>Förutsättningar: Källa 24 V, last 20 V, ström 2 A och returfallet 1 V. Samtidiga mätvärden.</a:t>
+              <a:t>Förutsättningar: Källa 24 V, last 20 V, ström 2 A och 1 V i returledaren. Värdena är mätta samtidigt.</a:t>
             </a:r>
           </a:p>
         </p:txBody>
@@ -6517,7 +6495,7 @@
                 <a:ea typeface="Calibri"/>
                 <a:cs typeface="Calibri"/>
               </a:rPr>
-              <a:t>Arbetsgång: Räkna hela slingans fall först och dra sedan bort den kända returens andel.</a:t>
+              <a:t>Arbetsgång: Räkna först ut hela fallet och dra sedan bort returledarens del.</a:t>
             </a:r>
           </a:p>
         </p:txBody>
@@ -6794,7 +6772,7 @@
                 <a:ea typeface="Calibri"/>
                 <a:cs typeface="Calibri"/>
               </a:rPr>
-              <a:t>Källa 24 V, last 20 V och ström 2 A. Returfallet är uppmätt till 1 V. Hur stort fall finns i framledningen?</a:t>
+              <a:t>Källan har 24 V, lasten 20 V och strömmen är 2 A. Spänningsfallet i returledaren är uppmätt till 1 V. Hur stort är fallet i framledaren?</a:t>
             </a:r>
           </a:p>
         </p:txBody>
@@ -7116,7 +7094,18 @@
                 <a:ea typeface="Calibri"/>
                 <a:cs typeface="Calibri"/>
               </a:rPr>
-              <a:t> = </a:t>
+              <a:t> = ΔU</a:t>
+            </a:r>
+            <a:r>
+              <a:rPr sz="2400" b="1" baseline="-25000">
+                <a:solidFill>
+                  <a:srgbClr val="064F91"/>
+                </a:solidFill>
+                <a:latin typeface="Calibri"/>
+                <a:ea typeface="Calibri"/>
+                <a:cs typeface="Calibri"/>
+              </a:rPr>
+              <a:t>fram</a:t>
             </a:r>
             <a:r>
               <a:rPr sz="2400" b="1">
@@ -7127,7 +7116,7 @@
                 <a:ea typeface="Calibri"/>
                 <a:cs typeface="Calibri"/>
               </a:rPr>
-              <a:t>ΔU</a:t>
+              <a:t>/I; R</a:t>
             </a:r>
             <a:r>
               <a:rPr sz="2400" b="1" baseline="-25000">
@@ -7138,7 +7127,7 @@
                 <a:ea typeface="Calibri"/>
                 <a:cs typeface="Calibri"/>
               </a:rPr>
-              <a:t>fram</a:t>
+              <a:t>retur</a:t>
             </a:r>
             <a:r>
               <a:rPr sz="2400" b="1">
@@ -7149,51 +7138,7 @@
                 <a:ea typeface="Calibri"/>
                 <a:cs typeface="Calibri"/>
               </a:rPr>
-              <a:t>/I     </a:t>
-            </a:r>
-            <a:r>
-              <a:rPr sz="2400" b="1">
-                <a:solidFill>
-                  <a:srgbClr val="064F91"/>
-                </a:solidFill>
-                <a:latin typeface="Calibri"/>
-                <a:ea typeface="Calibri"/>
-                <a:cs typeface="Calibri"/>
-              </a:rPr>
-              <a:t>R</a:t>
-            </a:r>
-            <a:r>
-              <a:rPr sz="2400" b="1" baseline="-25000">
-                <a:solidFill>
-                  <a:srgbClr val="064F91"/>
-                </a:solidFill>
-                <a:latin typeface="Calibri"/>
-                <a:ea typeface="Calibri"/>
-                <a:cs typeface="Calibri"/>
-              </a:rPr>
-              <a:t>retur</a:t>
-            </a:r>
-            <a:r>
-              <a:rPr sz="2400" b="1">
-                <a:solidFill>
-                  <a:srgbClr val="064F91"/>
-                </a:solidFill>
-                <a:latin typeface="Calibri"/>
-                <a:ea typeface="Calibri"/>
-                <a:cs typeface="Calibri"/>
-              </a:rPr>
-              <a:t> = </a:t>
-            </a:r>
-            <a:r>
-              <a:rPr sz="2400" b="1">
-                <a:solidFill>
-                  <a:srgbClr val="064F91"/>
-                </a:solidFill>
-                <a:latin typeface="Calibri"/>
-                <a:ea typeface="Calibri"/>
-                <a:cs typeface="Calibri"/>
-              </a:rPr>
-              <a:t>ΔU</a:t>
+              <a:t> = ΔU</a:t>
             </a:r>
             <a:r>
               <a:rPr sz="2400" b="1" baseline="-25000">
@@ -7272,7 +7217,7 @@
                 <a:ea typeface="Calibri"/>
                 <a:cs typeface="Calibri"/>
               </a:rPr>
-              <a:t>Samma ström går i framledning och retur i den enkla seriekretsen.</a:t>
+              <a:t>I en enkel seriekrets går samma ström i fram- och returledaren.</a:t>
             </a:r>
           </a:p>
         </p:txBody>
@@ -7452,7 +7397,7 @@
                 <a:ea typeface="Calibri"/>
                 <a:cs typeface="Calibri"/>
               </a:rPr>
-              <a:t>Arbetsgång: Beräkna framfallet från grunddata. Dividera respektive spänningsfall med strömmen.</a:t>
+              <a:t>Arbetsgång: Räkna ut fallet i framledaren och dela varje spänningsfall med strömmen.</a:t>
             </a:r>
           </a:p>
         </p:txBody>
@@ -7729,7 +7674,7 @@
                 <a:ea typeface="Calibri"/>
                 <a:cs typeface="Calibri"/>
               </a:rPr>
-              <a:t>Använd fallet i uppgift 4. Beräkna framledningens och returens resistans.</a:t>
+              <a:t>Använd värdena i uppgift 4. Beräkna resistansen i framledaren och i returledaren.</a:t>
             </a:r>
           </a:p>
         </p:txBody>
@@ -10580,7 +10525,18 @@
                 <a:ea typeface="Calibri"/>
                 <a:cs typeface="Calibri"/>
               </a:rPr>
-              <a:t> = </a:t>
+              <a:t> = U</a:t>
+            </a:r>
+            <a:r>
+              <a:rPr sz="2400" b="1" baseline="-25000">
+                <a:solidFill>
+                  <a:srgbClr val="064F91"/>
+                </a:solidFill>
+                <a:latin typeface="Calibri"/>
+                <a:ea typeface="Calibri"/>
+                <a:cs typeface="Calibri"/>
+              </a:rPr>
+              <a:t>last</a:t>
             </a:r>
             <a:r>
               <a:rPr sz="2400" b="1">
@@ -10591,51 +10547,7 @@
                 <a:ea typeface="Calibri"/>
                 <a:cs typeface="Calibri"/>
               </a:rPr>
-              <a:t>U</a:t>
-            </a:r>
-            <a:r>
-              <a:rPr sz="2400" b="1" baseline="-25000">
-                <a:solidFill>
-                  <a:srgbClr val="064F91"/>
-                </a:solidFill>
-                <a:latin typeface="Calibri"/>
-                <a:ea typeface="Calibri"/>
-                <a:cs typeface="Calibri"/>
-              </a:rPr>
-              <a:t>last</a:t>
-            </a:r>
-            <a:r>
-              <a:rPr sz="2400" b="1">
-                <a:solidFill>
-                  <a:srgbClr val="064F91"/>
-                </a:solidFill>
-                <a:latin typeface="Calibri"/>
-                <a:ea typeface="Calibri"/>
-                <a:cs typeface="Calibri"/>
-              </a:rPr>
-              <a:t> + </a:t>
-            </a:r>
-            <a:r>
-              <a:rPr sz="2400" b="1">
-                <a:solidFill>
-                  <a:srgbClr val="064F91"/>
-                </a:solidFill>
-                <a:latin typeface="Calibri"/>
-                <a:ea typeface="Calibri"/>
-                <a:cs typeface="Calibri"/>
-              </a:rPr>
-              <a:t>ΔU</a:t>
-            </a:r>
-            <a:r>
-              <a:rPr sz="2400" b="1" baseline="-25000">
-                <a:solidFill>
-                  <a:srgbClr val="064F91"/>
-                </a:solidFill>
-                <a:latin typeface="Calibri"/>
-                <a:ea typeface="Calibri"/>
-                <a:cs typeface="Calibri"/>
-              </a:rPr>
-              <a:t>kabel</a:t>
+              <a:t> + ΔUkabel</a:t>
             </a:r>
           </a:p>
         </p:txBody>
@@ -10692,7 +10604,7 @@
                 <a:ea typeface="Calibri"/>
                 <a:cs typeface="Calibri"/>
               </a:rPr>
-              <a:t>Spänningar mätta under samma belastning kan lokalisera var en förlust uppstår.</a:t>
+              <a:t>Spänningar som mäts under samma belastning visar var förlusten uppstår.</a:t>
             </a:r>
           </a:p>
         </p:txBody>
@@ -10749,7 +10661,7 @@
                 <a:ea typeface="Calibri"/>
                 <a:cs typeface="Calibri"/>
               </a:rPr>
-              <a:t>Förutsättningar: Källan håller 24 V, motorn får 18 V och kabelvägen tappar 6 V under last.</a:t>
+              <a:t>Förutsättningar: Källan håller 24 V, motorn får 18 V och i kabeln faller 6 V under last.</a:t>
             </a:r>
           </a:p>
         </p:txBody>
@@ -10806,7 +10718,7 @@
                 <a:ea typeface="Calibri"/>
                 <a:cs typeface="Calibri"/>
               </a:rPr>
-              <a:t>Arbetsgång: Jämför vilken av de två hypoteserna som passar alla mätvärden. Ange vad ytterligare kontroll behöver lokalisera.</a:t>
+              <a:t>Arbetsgång: Jämför vilken av förklaringarna som stämmer med alla mätvärden, och ange vad nästa kontroll ska ta reda på.</a:t>
             </a:r>
           </a:p>
         </p:txBody>
@@ -11083,7 +10995,7 @@
                 <a:ea typeface="Calibri"/>
                 <a:cs typeface="Calibri"/>
               </a:rPr>
-              <a:t>Pumpen går långsamt. Källan håller 24 V, motorn får 18 V och kabeln tappar 6 V under last. Vilken hypotes stöds mest: svag källa eller förhöjd resistans i kabelvägen?</a:t>
+              <a:t>En pump går långsamt. Källan håller 24 V, motorn får 18 V och i kabeln faller 6 V under last. Vilket stämmer bäst: en svag källa eller för hög resistans i kabeln?</a:t>
             </a:r>
           </a:p>
         </p:txBody>
@@ -11416,7 +11328,7 @@
                 <a:ea typeface="Calibri"/>
                 <a:cs typeface="Calibri"/>
               </a:rPr>
-              <a:t>Ett återkommande symtom kan bero på belastning, felström, inställning eller fel skyddsval.</a:t>
+              <a:t>Ett fel som kommer tillbaka kan bero på belastningen, en felström, inställningen eller att fel skydd är valt.</a:t>
             </a:r>
           </a:p>
         </p:txBody>
@@ -11473,7 +11385,7 @@
                 <a:ea typeface="Calibri"/>
                 <a:cs typeface="Calibri"/>
               </a:rPr>
-              <a:t>Förutsättningar: Skyddet har bytts två gånger och löser igen. Ingen orsaksanalys är redovisad.</a:t>
+              <a:t>Förutsättningar: Skyddet har bytts två gånger och löser ut igen. Ingen har utrett orsaken.</a:t>
             </a:r>
           </a:p>
         </p:txBody>
@@ -11530,7 +11442,7 @@
                 <a:ea typeface="Calibri"/>
                 <a:cs typeface="Calibri"/>
               </a:rPr>
-              <a:t>Arbetsgång: Förklara varför komponentbyte inte räcker som diagnos och ange vilken information som bör samlas.</a:t>
+              <a:t>Arbetsgång: Förklara varför ett byte inte är en diagnos och ange vilken information som bör samlas in.</a:t>
             </a:r>
           </a:p>
         </p:txBody>
@@ -11807,7 +11719,7 @@
                 <a:ea typeface="Calibri"/>
                 <a:cs typeface="Calibri"/>
               </a:rPr>
-              <a:t>Ett skydd har bytts två gånger och löser igen. Varför är ännu ett byte utan analys otillräckligt?</a:t>
+              <a:t>Ett skydd har bytts två gånger och löser ut igen. Varför räcker det inte att byta det en gång till?</a:t>
             </a:r>
           </a:p>
         </p:txBody>
@@ -12140,7 +12052,7 @@
                 <a:ea typeface="Calibri"/>
                 <a:cs typeface="Calibri"/>
               </a:rPr>
-              <a:t>Någon annan ska kunna se vilken del som ändrades, varför och vad efterkontrollen visade.</a:t>
+              <a:t>Någon annan ska kunna se vad som ändrades, varför och vad kontrollen efteråt visade.</a:t>
             </a:r>
           </a:p>
         </p:txBody>
@@ -12197,7 +12109,7 @@
                 <a:ea typeface="Calibri"/>
                 <a:cs typeface="Calibri"/>
               </a:rPr>
-              <a:t>Förutsättningar: Rapporten innehåller enbart ”bytte kabel, fungerar”.</a:t>
+              <a:t>Förutsättningar: Rapporten innehåller bara ”bytte kabel, fungerar”.</a:t>
             </a:r>
           </a:p>
         </p:txBody>
@@ -12254,7 +12166,7 @@
                 <a:ea typeface="Calibri"/>
                 <a:cs typeface="Calibri"/>
               </a:rPr>
-              <a:t>Arbetsgång: Föreslå tre konkreta kompletteringar, exempelvis objekt-ID, åtgärdsbeskrivning och mätprotokoll.</a:t>
+              <a:t>Arbetsgång: Föreslå tre konkreta tillägg, till exempel exakt vilken kabel, vad som gjordes och ett mätprotokoll.</a:t>
             </a:r>
           </a:p>
         </p:txBody>
@@ -13045,7 +12957,7 @@
                 <a:ea typeface="Calibri"/>
                 <a:cs typeface="Calibri"/>
               </a:rPr>
-              <a:t>Rapporten säger ”bytte kabel, fungerar”. Ange tre kompletteringar för spårbarhet.</a:t>
+              <a:t>Rapporten säger ”bytte kabel, fungerar”. Ange tre saker som bör läggas till så att någon annan kan följa vad som gjorts.</a:t>
             </a:r>
           </a:p>
         </p:txBody>
@@ -13378,7 +13290,7 @@
                 <a:ea typeface="Calibri"/>
                 <a:cs typeface="Calibri"/>
               </a:rPr>
-              <a:t>Ett lyckat normaldriftsprov ger inte automatiskt kunskap om reservdrift.</a:t>
+              <a:t>Att funktionen fungerar i normal drift säger inget om hur den fungerar på reservmatning.</a:t>
             </a:r>
           </a:p>
         </p:txBody>
@@ -13435,7 +13347,7 @@
                 <a:ea typeface="Calibri"/>
                 <a:cs typeface="Calibri"/>
               </a:rPr>
-              <a:t>Förutsättningar: Funktionen har provats i normaldrift. Ingen reservdriftskontroll är redovisad.</a:t>
+              <a:t>Förutsättningar: Funktionen har provats i normal drift. Ingen kontroll på reservmatning är redovisad.</a:t>
             </a:r>
           </a:p>
         </p:txBody>
@@ -13492,7 +13404,7 @@
                 <a:ea typeface="Calibri"/>
                 <a:cs typeface="Calibri"/>
               </a:rPr>
-              <a:t>Arbetsgång: Formulera vad som är verifierat och vad som återstår. Undvik ett generellt godkännande.</a:t>
+              <a:t>Arbetsgång: Skriv vad som är kontrollerat och vad som återstår, utan att godkänna allt.</a:t>
             </a:r>
           </a:p>
         </p:txBody>
@@ -13769,7 +13681,7 @@
                 <a:ea typeface="Calibri"/>
                 <a:cs typeface="Calibri"/>
               </a:rPr>
-              <a:t>En funktion är kontrollerad i normaldrift men inte på reservmatning. Hur ska slutsatsen formuleras?</a:t>
+              <a:t>En funktion är kontrollerad i normal drift men inte på reservmatning. Hur ska slutsatsen skrivas?</a:t>
             </a:r>
           </a:p>
         </p:txBody>
@@ -14045,128 +13957,7 @@
                 <a:ea typeface="Calibri"/>
                 <a:cs typeface="Calibri"/>
               </a:rPr>
-              <a:t>R</a:t>
-            </a:r>
-            <a:r>
-              <a:rPr sz="2400" b="1" baseline="-25000">
-                <a:solidFill>
-                  <a:srgbClr val="064F91"/>
-                </a:solidFill>
-                <a:latin typeface="Calibri"/>
-                <a:ea typeface="Calibri"/>
-                <a:cs typeface="Calibri"/>
-              </a:rPr>
-              <a:t>före</a:t>
-            </a:r>
-            <a:r>
-              <a:rPr sz="2400" b="1">
-                <a:solidFill>
-                  <a:srgbClr val="064F91"/>
-                </a:solidFill>
-                <a:latin typeface="Calibri"/>
-                <a:ea typeface="Calibri"/>
-                <a:cs typeface="Calibri"/>
-              </a:rPr>
-              <a:t> = </a:t>
-            </a:r>
-            <a:r>
-              <a:rPr sz="2400" b="1">
-                <a:solidFill>
-                  <a:srgbClr val="064F91"/>
-                </a:solidFill>
-                <a:latin typeface="Calibri"/>
-                <a:ea typeface="Calibri"/>
-                <a:cs typeface="Calibri"/>
-              </a:rPr>
-              <a:t>ΔU</a:t>
-            </a:r>
-            <a:r>
-              <a:rPr sz="2400" b="1" baseline="-25000">
-                <a:solidFill>
-                  <a:srgbClr val="064F91"/>
-                </a:solidFill>
-                <a:latin typeface="Calibri"/>
-                <a:ea typeface="Calibri"/>
-                <a:cs typeface="Calibri"/>
-              </a:rPr>
-              <a:t>före</a:t>
-            </a:r>
-            <a:r>
-              <a:rPr sz="2400" b="1">
-                <a:solidFill>
-                  <a:srgbClr val="064F91"/>
-                </a:solidFill>
-                <a:latin typeface="Calibri"/>
-                <a:ea typeface="Calibri"/>
-                <a:cs typeface="Calibri"/>
-              </a:rPr>
-              <a:t>/I     </a:t>
-            </a:r>
-            <a:r>
-              <a:rPr sz="2400" b="1">
-                <a:solidFill>
-                  <a:srgbClr val="064F91"/>
-                </a:solidFill>
-                <a:latin typeface="Calibri"/>
-                <a:ea typeface="Calibri"/>
-                <a:cs typeface="Calibri"/>
-              </a:rPr>
-              <a:t>R</a:t>
-            </a:r>
-            <a:r>
-              <a:rPr sz="2400" b="1" baseline="-25000">
-                <a:solidFill>
-                  <a:srgbClr val="064F91"/>
-                </a:solidFill>
-                <a:latin typeface="Calibri"/>
-                <a:ea typeface="Calibri"/>
-                <a:cs typeface="Calibri"/>
-              </a:rPr>
-              <a:t>efter</a:t>
-            </a:r>
-            <a:r>
-              <a:rPr sz="2400" b="1">
-                <a:solidFill>
-                  <a:srgbClr val="064F91"/>
-                </a:solidFill>
-                <a:latin typeface="Calibri"/>
-                <a:ea typeface="Calibri"/>
-                <a:cs typeface="Calibri"/>
-              </a:rPr>
-              <a:t> = </a:t>
-            </a:r>
-            <a:r>
-              <a:rPr sz="2400" b="1">
-                <a:solidFill>
-                  <a:srgbClr val="064F91"/>
-                </a:solidFill>
-                <a:latin typeface="Calibri"/>
-                <a:ea typeface="Calibri"/>
-                <a:cs typeface="Calibri"/>
-              </a:rPr>
-              <a:t>ΔU</a:t>
-            </a:r>
-            <a:r>
-              <a:rPr sz="2400" b="1" baseline="-25000">
-                <a:solidFill>
-                  <a:srgbClr val="064F91"/>
-                </a:solidFill>
-                <a:latin typeface="Calibri"/>
-                <a:ea typeface="Calibri"/>
-                <a:cs typeface="Calibri"/>
-              </a:rPr>
-              <a:t>efter</a:t>
-            </a:r>
-            <a:r>
-              <a:rPr sz="2400" b="1">
-                <a:solidFill>
-                  <a:srgbClr val="064F91"/>
-                </a:solidFill>
-                <a:latin typeface="Calibri"/>
-                <a:ea typeface="Calibri"/>
-                <a:cs typeface="Calibri"/>
-              </a:rPr>
-              <a:t>/I</a:t>
+              <a:t>Rföre = ΔUföre/I; Refter = ΔUefter/I</a:t>
             </a:r>
           </a:p>
         </p:txBody>
@@ -14223,7 +14014,7 @@
                 <a:ea typeface="Calibri"/>
                 <a:cs typeface="Calibri"/>
               </a:rPr>
-              <a:t>Resistans kan jämföras direkt när ström, mätpunkter och övriga villkor hålls lika.</a:t>
+              <a:t>Resistanserna kan jämföras direkt eftersom ström och mätpunkter är desamma.</a:t>
             </a:r>
           </a:p>
         </p:txBody>
@@ -14280,7 +14071,7 @@
                 <a:ea typeface="Calibri"/>
                 <a:cs typeface="Calibri"/>
               </a:rPr>
-              <a:t>Förutsättningar: Före 6 V vid 3 A, efter 0,3 V vid 3 A. Lasten fungerar efter åtgärd.</a:t>
+              <a:t>Förutsättningar: Före: 6 V vid 3 A. Efter: 0,3 V vid 3 A. Lasten fungerar efter åtgärden.</a:t>
             </a:r>
           </a:p>
         </p:txBody>
@@ -14337,7 +14128,7 @@
                 <a:ea typeface="Calibri"/>
                 <a:cs typeface="Calibri"/>
               </a:rPr>
-              <a:t>Arbetsgång: Räkna båda resistanserna och beskriv vad de stödjer. Ange också föreskriven anslutnings- eller säkerhetskontroll.</a:t>
+              <a:t>Arbetsgång: Räkna ut båda och beskriv vad de visar. Ange också vilken föreskriven kontroll av anslutning eller säkerhet som återstår.</a:t>
             </a:r>
           </a:p>
         </p:txBody>
@@ -14614,7 +14405,7 @@
                 <a:ea typeface="Calibri"/>
                 <a:cs typeface="Calibri"/>
               </a:rPr>
-              <a:t>Före åtgärd: 6 V kabelfall vid 3 A. Efter åtgärd: 0,3 V vid 3 A. Lasten fungerar. Skriv en teknisk slutsats och ett kvarstående kontrollbehov.</a:t>
+              <a:t>Före åtgärden föll 6 V i kabeln vid 3 A. Efter åtgärden faller 0,3 V vid samma ström, och lasten fungerar. Skriv en teknisk slutsats och en kontroll som återstår.</a:t>
             </a:r>
           </a:p>
         </p:txBody>

--- a/sjoskolan/vecka-45/aktuell/v45_02_Analys_av_matresultat_elev.pptx
+++ b/sjoskolan/vecka-45/aktuell/v45_02_Analys_av_matresultat_elev.pptx
@@ -3785,7 +3785,7 @@
                 <a:ea typeface="Calibri"/>
                 <a:cs typeface="Calibri"/>
               </a:rPr>
-              <a:t>Stöd till övning 1</a:t>
+              <a:t>Stöd till övning 2.1</a:t>
             </a:r>
           </a:p>
         </p:txBody>
@@ -4174,7 +4174,7 @@
                 <a:ea typeface="Calibri"/>
                 <a:cs typeface="Calibri"/>
               </a:rPr>
-              <a:t>Övning 1</a:t>
+              <a:t>Övning 2.1</a:t>
             </a:r>
           </a:p>
         </p:txBody>
@@ -4509,7 +4509,7 @@
                 <a:ea typeface="Calibri"/>
                 <a:cs typeface="Calibri"/>
               </a:rPr>
-              <a:t>Stöd till övning 2</a:t>
+              <a:t>Stöd till övning 2.2</a:t>
             </a:r>
           </a:p>
         </p:txBody>
@@ -5031,7 +5031,7 @@
                 <a:ea typeface="Calibri"/>
                 <a:cs typeface="Calibri"/>
               </a:rPr>
-              <a:t>Övning 2</a:t>
+              <a:t>Övning 2.2</a:t>
             </a:r>
           </a:p>
         </p:txBody>
@@ -5366,7 +5366,7 @@
                 <a:ea typeface="Calibri"/>
                 <a:cs typeface="Calibri"/>
               </a:rPr>
-              <a:t>Stöd till övning 3</a:t>
+              <a:t>Stöd till övning 2.3</a:t>
             </a:r>
           </a:p>
         </p:txBody>
@@ -5755,7 +5755,7 @@
                 <a:ea typeface="Calibri"/>
                 <a:cs typeface="Calibri"/>
               </a:rPr>
-              <a:t>Övning 3</a:t>
+              <a:t>Övning 2.3</a:t>
             </a:r>
           </a:p>
         </p:txBody>
@@ -6090,7 +6090,7 @@
                 <a:ea typeface="Calibri"/>
                 <a:cs typeface="Calibri"/>
               </a:rPr>
-              <a:t>Stöd till övning 4</a:t>
+              <a:t>Stöd till övning 2.4</a:t>
             </a:r>
           </a:p>
         </p:txBody>
@@ -6656,7 +6656,7 @@
                 <a:ea typeface="Calibri"/>
                 <a:cs typeface="Calibri"/>
               </a:rPr>
-              <a:t>Övning 4</a:t>
+              <a:t>Övning 2.4</a:t>
             </a:r>
           </a:p>
         </p:txBody>
@@ -7015,7 +7015,7 @@
                 <a:ea typeface="Calibri"/>
                 <a:cs typeface="Calibri"/>
               </a:rPr>
-              <a:t>Stöd till övning 5</a:t>
+              <a:t>Stöd till övning 2.5</a:t>
             </a:r>
           </a:p>
         </p:txBody>
@@ -7558,7 +7558,7 @@
                 <a:ea typeface="Calibri"/>
                 <a:cs typeface="Calibri"/>
               </a:rPr>
-              <a:t>Övning 5</a:t>
+              <a:t>Övning 2.5</a:t>
             </a:r>
           </a:p>
         </p:txBody>
@@ -10446,7 +10446,7 @@
                 <a:ea typeface="Calibri"/>
                 <a:cs typeface="Calibri"/>
               </a:rPr>
-              <a:t>Stöd till övning 6</a:t>
+              <a:t>Stöd till övning 2.6</a:t>
             </a:r>
           </a:p>
         </p:txBody>
@@ -10879,7 +10879,7 @@
                 <a:ea typeface="Calibri"/>
                 <a:cs typeface="Calibri"/>
               </a:rPr>
-              <a:t>Övning 6</a:t>
+              <a:t>Övning 2.6</a:t>
             </a:r>
           </a:p>
         </p:txBody>
@@ -11214,7 +11214,7 @@
                 <a:ea typeface="Calibri"/>
                 <a:cs typeface="Calibri"/>
               </a:rPr>
-              <a:t>Stöd till övning 7</a:t>
+              <a:t>Stöd till övning 2.7</a:t>
             </a:r>
           </a:p>
         </p:txBody>
@@ -11603,7 +11603,7 @@
                 <a:ea typeface="Calibri"/>
                 <a:cs typeface="Calibri"/>
               </a:rPr>
-              <a:t>Övning 7</a:t>
+              <a:t>Övning 2.7</a:t>
             </a:r>
           </a:p>
         </p:txBody>
@@ -11938,7 +11938,7 @@
                 <a:ea typeface="Calibri"/>
                 <a:cs typeface="Calibri"/>
               </a:rPr>
-              <a:t>Stöd till övning 8</a:t>
+              <a:t>Stöd till övning 2.8</a:t>
             </a:r>
           </a:p>
         </p:txBody>
@@ -12841,7 +12841,7 @@
                 <a:ea typeface="Calibri"/>
                 <a:cs typeface="Calibri"/>
               </a:rPr>
-              <a:t>Övning 8</a:t>
+              <a:t>Övning 2.8</a:t>
             </a:r>
           </a:p>
         </p:txBody>
@@ -13176,7 +13176,7 @@
                 <a:ea typeface="Calibri"/>
                 <a:cs typeface="Calibri"/>
               </a:rPr>
-              <a:t>Stöd till övning 9</a:t>
+              <a:t>Stöd till övning 2.9</a:t>
             </a:r>
           </a:p>
         </p:txBody>
@@ -13565,7 +13565,7 @@
                 <a:ea typeface="Calibri"/>
                 <a:cs typeface="Calibri"/>
               </a:rPr>
-              <a:t>Övning 9</a:t>
+              <a:t>Övning 2.9</a:t>
             </a:r>
           </a:p>
         </p:txBody>
@@ -13900,7 +13900,7 @@
                 <a:ea typeface="Calibri"/>
                 <a:cs typeface="Calibri"/>
               </a:rPr>
-              <a:t>Stöd till övning 10</a:t>
+              <a:t>Stöd till övning 2.10</a:t>
             </a:r>
           </a:p>
         </p:txBody>
@@ -14289,7 +14289,7 @@
                 <a:ea typeface="Calibri"/>
                 <a:cs typeface="Calibri"/>
               </a:rPr>
-              <a:t>Övning 10</a:t>
+              <a:t>Övning 2.10</a:t>
             </a:r>
           </a:p>
         </p:txBody>

--- a/sjoskolan/vecka-45/aktuell/v45_02_Analys_av_matresultat_elev.pptx
+++ b/sjoskolan/vecka-45/aktuell/v45_02_Analys_av_matresultat_elev.pptx
@@ -3512,6 +3512,10 @@
             <a:noFill/>
           </a:ln>
         </p:spPr>
+        <p:txBody xmlns:a="http://schemas.openxmlformats.org/drawingml/2006/main">
+          <a:bodyPr/>
+          <a:p/>
+        </p:txBody>
       </p:sp>
       <p:sp>
         <p:nvSpPr>
@@ -8452,7 +8456,7 @@
                 <a:ea typeface="Calibri"/>
                 <a:cs typeface="Calibri"/>
               </a:rPr>
-              <a:t>Teori och exempel följs av övning 6–10.</a:t>
+              <a:t>Teori och exempel följs av övning 2.6–2.10.</a:t>
             </a:r>
           </a:p>
           <a:p xmlns:a="http://schemas.openxmlformats.org/drawingml/2006/main">
@@ -12463,7 +12467,7 @@
                 <a:ea typeface="Calibri"/>
                 <a:cs typeface="Calibri"/>
               </a:rPr>
-              <a:t>15 min övning 1, 2, 4, 5 min återkoppling</a:t>
+              <a:t>15 min övning 2.1, 2.2 och 2.4, 5 min återkoppling</a:t>
             </a:r>
           </a:p>
         </p:txBody>
@@ -12577,7 +12581,7 @@
                 <a:ea typeface="Calibri"/>
                 <a:cs typeface="Calibri"/>
               </a:rPr>
-              <a:t>20 min teori och exempel, 15 min övning 6, 7, 8</a:t>
+              <a:t>20 min teori och exempel, 15 min övning 2.6, 2.7 och 2.8</a:t>
             </a:r>
           </a:p>
           <a:p xmlns:a="http://schemas.openxmlformats.org/drawingml/2006/main">

--- a/sjoskolan/vecka-45/aktuell/v45_02_Analys_av_matresultat_elev.pptx
+++ b/sjoskolan/vecka-45/aktuell/v45_02_Analys_av_matresultat_elev.pptx
@@ -7678,7 +7678,7 @@
                 <a:ea typeface="Calibri"/>
                 <a:cs typeface="Calibri"/>
               </a:rPr>
-              <a:t>Använd värdena i uppgift 4. Beräkna resistansen i framledaren och i returledaren.</a:t>
+              <a:t>Använd värdena i föregående övning. Beräkna resistansen i framledaren och i returledaren.</a:t>
             </a:r>
           </a:p>
         </p:txBody>

--- a/sjoskolan/vecka-45/aktuell/v45_02_Analys_av_matresultat_elev.pptx
+++ b/sjoskolan/vecka-45/aktuell/v45_02_Analys_av_matresultat_elev.pptx
@@ -13961,7 +13961,51 @@
                 <a:ea typeface="Calibri"/>
                 <a:cs typeface="Calibri"/>
               </a:rPr>
-              <a:t>Rföre = ΔUföre/I; Refter = ΔUefter/I</a:t>
+              <a:t>R</a:t>
+            </a:r>
+            <a:r>
+              <a:rPr sz="2400" b="1" baseline="-25000">
+                <a:solidFill>
+                  <a:srgbClr val="064F91"/>
+                </a:solidFill>
+                <a:latin typeface="Calibri"/>
+                <a:ea typeface="Calibri"/>
+                <a:cs typeface="Calibri"/>
+              </a:rPr>
+              <a:t>före</a:t>
+            </a:r>
+            <a:r>
+              <a:rPr sz="2400" b="1">
+                <a:solidFill>
+                  <a:srgbClr val="064F91"/>
+                </a:solidFill>
+                <a:latin typeface="Calibri"/>
+                <a:ea typeface="Calibri"/>
+                <a:cs typeface="Calibri"/>
+              </a:rPr>
+              <a:t> = ΔUföre/I; R</a:t>
+            </a:r>
+            <a:r>
+              <a:rPr sz="2400" b="1" baseline="-25000">
+                <a:solidFill>
+                  <a:srgbClr val="064F91"/>
+                </a:solidFill>
+                <a:latin typeface="Calibri"/>
+                <a:ea typeface="Calibri"/>
+                <a:cs typeface="Calibri"/>
+              </a:rPr>
+              <a:t>efter</a:t>
+            </a:r>
+            <a:r>
+              <a:rPr sz="2400" b="1">
+                <a:solidFill>
+                  <a:srgbClr val="064F91"/>
+                </a:solidFill>
+                <a:latin typeface="Calibri"/>
+                <a:ea typeface="Calibri"/>
+                <a:cs typeface="Calibri"/>
+              </a:rPr>
+              <a:t> = ΔUefter/I</a:t>
             </a:r>
           </a:p>
         </p:txBody>

--- a/sjoskolan/vecka-45/aktuell/v45_02_Analys_av_matresultat_elev.pptx
+++ b/sjoskolan/vecka-45/aktuell/v45_02_Analys_av_matresultat_elev.pptx
@@ -3903,7 +3903,7 @@
                 <a:ea typeface="Calibri"/>
                 <a:cs typeface="Calibri"/>
               </a:rPr>
-              <a:t>Spänningen utan last visar källans tomgångsspänning. Om källan klarar lasten kan du bara avgöra med ström och spänning under last.</a:t>
+              <a:t>Utan last går nästan ingen ström. Tänk på vad som kan ändras när lasten kopplas in.</a:t>
             </a:r>
           </a:p>
         </p:txBody>
@@ -4294,7 +4294,7 @@
                 <a:ea typeface="Calibri"/>
                 <a:cs typeface="Calibri"/>
               </a:rPr>
-              <a:t>Vid en källa utan last mäts 24,0 V. Vilken slutsats kan du dra direkt, och vilken kräver mer data?</a:t>
+              <a:t>Du mäter 24,0 V på en källa. Ingen last är inkopplad. a) Vad vet du nu? b) Vad vet du inte än, och vad behöver du mäta för att veta det?</a:t>
             </a:r>
           </a:p>
         </p:txBody>
@@ -5875,7 +5875,7 @@
                 <a:ea typeface="Calibri"/>
                 <a:cs typeface="Calibri"/>
               </a:rPr>
-              <a:t>Instrument A visar 10,00 ±0,10 V och B visar 10,12 ±0,10 V. Bevisar skillnaden i sig att ett av instrumenten är fel?</a:t>
+              <a:t>Två instrument mäter samma spänning. A visar 10,00 V ±0,10 V. B visar 10,12 V ±0,10 V. Måste ett av instrumenten vara fel?</a:t>
             </a:r>
           </a:p>
         </p:txBody>
@@ -10551,7 +10551,18 @@
                 <a:ea typeface="Calibri"/>
                 <a:cs typeface="Calibri"/>
               </a:rPr>
-              <a:t> + ΔUkabel</a:t>
+              <a:t> + ΔU</a:t>
+            </a:r>
+            <a:r>
+              <a:rPr sz="2400" b="1" baseline="-25000">
+                <a:solidFill>
+                  <a:srgbClr val="064F91"/>
+                </a:solidFill>
+                <a:latin typeface="Calibri"/>
+                <a:ea typeface="Calibri"/>
+                <a:cs typeface="Calibri"/>
+              </a:rPr>
+              <a:t>kabel</a:t>
             </a:r>
           </a:p>
         </p:txBody>
@@ -12170,7 +12181,7 @@
                 <a:ea typeface="Calibri"/>
                 <a:cs typeface="Calibri"/>
               </a:rPr>
-              <a:t>Arbetsgång: Föreslå tre konkreta tillägg, till exempel exakt vilken kabel, vad som gjordes och ett mätprotokoll.</a:t>
+              <a:t>Arbetsgång: Tänk dig att en kollega läser rapporten om ett år. Vad behöver hen veta om kabeln, om arbetet och om provet efteråt?</a:t>
             </a:r>
           </a:p>
         </p:txBody>
@@ -13685,7 +13696,7 @@
                 <a:ea typeface="Calibri"/>
                 <a:cs typeface="Calibri"/>
               </a:rPr>
-              <a:t>En funktion är kontrollerad i normal drift men inte på reservmatning. Hur ska slutsatsen skrivas?</a:t>
+              <a:t>En funktion är provad med vanlig matning. Den är inte provad på reservmatning. Skriv slutsatsen i en eller två meningar: vad är kontrollerat, och vad är inte kontrollerat?</a:t>
             </a:r>
           </a:p>
         </p:txBody>
@@ -13983,7 +13994,7 @@
                 <a:ea typeface="Calibri"/>
                 <a:cs typeface="Calibri"/>
               </a:rPr>
-              <a:t> = ΔUföre/I; R</a:t>
+              <a:t> = ΔU</a:t>
             </a:r>
             <a:r>
               <a:rPr sz="2400" b="1" baseline="-25000">
@@ -13994,6 +14005,28 @@
                 <a:ea typeface="Calibri"/>
                 <a:cs typeface="Calibri"/>
               </a:rPr>
+              <a:t>före</a:t>
+            </a:r>
+            <a:r>
+              <a:rPr sz="2400" b="1">
+                <a:solidFill>
+                  <a:srgbClr val="064F91"/>
+                </a:solidFill>
+                <a:latin typeface="Calibri"/>
+                <a:ea typeface="Calibri"/>
+                <a:cs typeface="Calibri"/>
+              </a:rPr>
+              <a:t>/I; R</a:t>
+            </a:r>
+            <a:r>
+              <a:rPr sz="2400" b="1" baseline="-25000">
+                <a:solidFill>
+                  <a:srgbClr val="064F91"/>
+                </a:solidFill>
+                <a:latin typeface="Calibri"/>
+                <a:ea typeface="Calibri"/>
+                <a:cs typeface="Calibri"/>
+              </a:rPr>
               <a:t>efter</a:t>
             </a:r>
             <a:r>
@@ -14005,7 +14038,29 @@
                 <a:ea typeface="Calibri"/>
                 <a:cs typeface="Calibri"/>
               </a:rPr>
-              <a:t> = ΔUefter/I</a:t>
+              <a:t> = ΔU</a:t>
+            </a:r>
+            <a:r>
+              <a:rPr sz="2400" b="1" baseline="-25000">
+                <a:solidFill>
+                  <a:srgbClr val="064F91"/>
+                </a:solidFill>
+                <a:latin typeface="Calibri"/>
+                <a:ea typeface="Calibri"/>
+                <a:cs typeface="Calibri"/>
+              </a:rPr>
+              <a:t>efter</a:t>
+            </a:r>
+            <a:r>
+              <a:rPr sz="2400" b="1">
+                <a:solidFill>
+                  <a:srgbClr val="064F91"/>
+                </a:solidFill>
+                <a:latin typeface="Calibri"/>
+                <a:ea typeface="Calibri"/>
+                <a:cs typeface="Calibri"/>
+              </a:rPr>
+              <a:t>/I</a:t>
             </a:r>
           </a:p>
         </p:txBody>
@@ -15542,7 +15597,7 @@
                 <a:ea typeface="Calibri"/>
                 <a:cs typeface="Calibri"/>
               </a:rPr>
-              <a:t>Toleransintervallet beskriver tillåtna värden enligt uppgiftens krav.</a:t>
+              <a:t>Kravet säger vilka värden som är tillåtna. Det kallas toleransintervall.</a:t>
             </a:r>
           </a:p>
         </p:txBody>
@@ -15599,7 +15654,7 @@
                 <a:ea typeface="Calibri"/>
                 <a:cs typeface="Calibri"/>
               </a:rPr>
-              <a:t>Beslutsregeln anger hur intervallen jämförs innan slutsatsen dras.</a:t>
+              <a:t>Beslutsregeln i kursen: hela mätintervallet måste ligga inom kravet.</a:t>
             </a:r>
           </a:p>
         </p:txBody>

--- a/sjoskolan/vecka-45/aktuell/v45_02_Analys_av_matresultat_elev.pptx
+++ b/sjoskolan/vecka-45/aktuell/v45_02_Analys_av_matresultat_elev.pptx
@@ -6656,7 +6656,7 @@
                 </a:solidFill>
                 <a:latin typeface="Calibri"/>
               </a:rPr>
-              <a:t>1. Läs del 4: alla sju avsnitt och de två exemplen.</a:t>
+              <a:t>1. Läs del 4: alla sju avsnitt och de två exemplen. Tryck på ”Jag har läst del 4” längst ned på sidan.</a:t>
             </a:r>
           </a:p>
           <a:p>
@@ -6713,7 +6713,7 @@
                 </a:solidFill>
                 <a:latin typeface="Calibri"/>
               </a:rPr>
-              <a:t>4. Gör analysen av mätdata. Den bygger på del 3 och 4.</a:t>
+              <a:t>4. Gör analysen av mätdata, inlämning 4. Den bygger på del 3 och 4.</a:t>
             </a:r>
           </a:p>
           <a:p>

--- a/sjoskolan/vecka-45/aktuell/v45_02_Analys_av_matresultat_elev.pptx
+++ b/sjoskolan/vecka-45/aktuell/v45_02_Analys_av_matresultat_elev.pptx
@@ -3491,7 +3491,7 @@
         <p:spPr>
           <a:xfrm>
             <a:off x="548640" y="1005840"/>
-            <a:ext cx="6035040" cy="1645920"/>
+            <a:ext cx="6035040" cy="914400"/>
           </a:xfrm>
           <a:prstGeom prst="rect">
             <a:avLst/>
@@ -3532,7 +3532,7 @@
         </p:nvSpPr>
         <p:spPr>
           <a:xfrm>
-            <a:off x="548640" y="2697480"/>
+            <a:off x="548640" y="1965960"/>
             <a:ext cx="5669280" cy="914400"/>
           </a:xfrm>
           <a:prstGeom prst="rect">
@@ -3574,7 +3574,7 @@
         </p:nvSpPr>
         <p:spPr>
           <a:xfrm>
-            <a:off x="548640" y="3703320"/>
+            <a:off x="548640" y="2971800"/>
             <a:ext cx="5852160" cy="411480"/>
           </a:xfrm>
           <a:prstGeom prst="rect">
@@ -6675,7 +6675,7 @@
                 </a:solidFill>
                 <a:latin typeface="Calibri"/>
               </a:rPr>
-              <a:t>2. Gör övning 2.4–2.6 på delsidan för del 4. Ledtrådar och facit finns där.</a:t>
+              <a:t>2. Gör övning 2.4–2.6 på delsidan för del 4. Övning 2.7–2.10 är extra. Ledtrådar och facit finns där.</a:t>
             </a:r>
           </a:p>
           <a:p>
@@ -6713,7 +6713,7 @@
                 </a:solidFill>
                 <a:latin typeface="Calibri"/>
               </a:rPr>
-              <a:t>4. Gör analysen av mätdata, inlämning 4. Den bygger på del 3 och 4.</a:t>
+              <a:t>4. Gör analysen av mätdata, inlämning 4.</a:t>
             </a:r>
           </a:p>
           <a:p>
@@ -6770,7 +6770,7 @@
                 </a:solidFill>
                 <a:latin typeface="Calibri"/>
               </a:rPr>
-              <a:t>Inlämningen och analysen av mätdata senast fredag 30 oktober. Allt finns på veckosidan.</a:t>
+              <a:t>Inlämningen, uppgift 1–4, senast fredag 30 oktober. Allt finns på veckosidan.</a:t>
             </a:r>
           </a:p>
         </p:txBody>
